--- a/docs/GeoNap Presentations/GeoNap_Marketing_Deck.pptx
+++ b/docs/GeoNap Presentations/GeoNap_Marketing_Deck.pptx
@@ -318,7 +318,7 @@
           <a:p>
             <a:fld id="{5BCAD085-E8A6-8845-BD4E-CB4CCA059FC4}" type="datetimeFigureOut">
               <a:rPr lang="en-US" smtClean="0"/>
-              <a:t>7/3/26</a:t>
+              <a:t>7/10/26</a:t>
             </a:fld>
             <a:endParaRPr lang="en-US"/>
           </a:p>
@@ -486,7 +486,7 @@
           <a:p>
             <a:fld id="{5BCAD085-E8A6-8845-BD4E-CB4CCA059FC4}" type="datetimeFigureOut">
               <a:rPr lang="en-US" smtClean="0"/>
-              <a:t>7/3/26</a:t>
+              <a:t>7/10/26</a:t>
             </a:fld>
             <a:endParaRPr lang="en-US"/>
           </a:p>
@@ -664,7 +664,7 @@
           <a:p>
             <a:fld id="{5BCAD085-E8A6-8845-BD4E-CB4CCA059FC4}" type="datetimeFigureOut">
               <a:rPr lang="en-US" smtClean="0"/>
-              <a:t>7/3/26</a:t>
+              <a:t>7/10/26</a:t>
             </a:fld>
             <a:endParaRPr lang="en-US"/>
           </a:p>
@@ -832,7 +832,7 @@
           <a:p>
             <a:fld id="{5BCAD085-E8A6-8845-BD4E-CB4CCA059FC4}" type="datetimeFigureOut">
               <a:rPr lang="en-US" smtClean="0"/>
-              <a:t>7/3/26</a:t>
+              <a:t>7/10/26</a:t>
             </a:fld>
             <a:endParaRPr lang="en-US"/>
           </a:p>
@@ -1077,7 +1077,7 @@
           <a:p>
             <a:fld id="{5BCAD085-E8A6-8845-BD4E-CB4CCA059FC4}" type="datetimeFigureOut">
               <a:rPr lang="en-US" smtClean="0"/>
-              <a:t>7/3/26</a:t>
+              <a:t>7/10/26</a:t>
             </a:fld>
             <a:endParaRPr lang="en-US"/>
           </a:p>
@@ -1362,7 +1362,7 @@
           <a:p>
             <a:fld id="{5BCAD085-E8A6-8845-BD4E-CB4CCA059FC4}" type="datetimeFigureOut">
               <a:rPr lang="en-US" smtClean="0"/>
-              <a:t>7/3/26</a:t>
+              <a:t>7/10/26</a:t>
             </a:fld>
             <a:endParaRPr lang="en-US"/>
           </a:p>
@@ -1781,7 +1781,7 @@
           <a:p>
             <a:fld id="{5BCAD085-E8A6-8845-BD4E-CB4CCA059FC4}" type="datetimeFigureOut">
               <a:rPr lang="en-US" smtClean="0"/>
-              <a:t>7/3/26</a:t>
+              <a:t>7/10/26</a:t>
             </a:fld>
             <a:endParaRPr lang="en-US"/>
           </a:p>
@@ -1898,7 +1898,7 @@
           <a:p>
             <a:fld id="{5BCAD085-E8A6-8845-BD4E-CB4CCA059FC4}" type="datetimeFigureOut">
               <a:rPr lang="en-US" smtClean="0"/>
-              <a:t>7/3/26</a:t>
+              <a:t>7/10/26</a:t>
             </a:fld>
             <a:endParaRPr lang="en-US"/>
           </a:p>
@@ -1993,7 +1993,7 @@
           <a:p>
             <a:fld id="{5BCAD085-E8A6-8845-BD4E-CB4CCA059FC4}" type="datetimeFigureOut">
               <a:rPr lang="en-US" smtClean="0"/>
-              <a:t>7/3/26</a:t>
+              <a:t>7/10/26</a:t>
             </a:fld>
             <a:endParaRPr lang="en-US"/>
           </a:p>
@@ -2268,7 +2268,7 @@
           <a:p>
             <a:fld id="{5BCAD085-E8A6-8845-BD4E-CB4CCA059FC4}" type="datetimeFigureOut">
               <a:rPr lang="en-US" smtClean="0"/>
-              <a:t>7/3/26</a:t>
+              <a:t>7/10/26</a:t>
             </a:fld>
             <a:endParaRPr lang="en-US"/>
           </a:p>
@@ -2520,7 +2520,7 @@
           <a:p>
             <a:fld id="{5BCAD085-E8A6-8845-BD4E-CB4CCA059FC4}" type="datetimeFigureOut">
               <a:rPr lang="en-US" smtClean="0"/>
-              <a:t>7/3/26</a:t>
+              <a:t>7/10/26</a:t>
             </a:fld>
             <a:endParaRPr lang="en-US"/>
           </a:p>
@@ -2731,7 +2731,7 @@
           <a:p>
             <a:fld id="{5BCAD085-E8A6-8845-BD4E-CB4CCA059FC4}" type="datetimeFigureOut">
               <a:rPr lang="en-US" smtClean="0"/>
-              <a:t>7/3/26</a:t>
+              <a:t>7/10/26</a:t>
             </a:fld>
             <a:endParaRPr lang="en-US"/>
           </a:p>
@@ -3545,7 +3545,7 @@
               </a:lnSpc>
             </a:pPr>
             <a:r>
-              <a:rPr sz="4400" b="1" i="0">
+              <a:rPr sz="4400" b="1" i="0" dirty="0">
                 <a:solidFill>
                   <a:srgbClr val="FFFFFF"/>
                 </a:solidFill>
@@ -3584,7 +3584,7 @@
               </a:lnSpc>
             </a:pPr>
             <a:r>
-              <a:rPr sz="1700" b="0" i="0">
+              <a:rPr sz="1700" b="0" i="0" dirty="0">
                 <a:solidFill>
                   <a:srgbClr val="B9C6CE"/>
                 </a:solidFill>
@@ -3672,7 +3672,25 @@
                 </a:solidFill>
                 <a:latin typeface="Calibri"/>
               </a:rPr>
-              <a:t>For Commuters, Travelers &amp; Anyone Who Naps On the Move</a:t>
+              <a:t>For Commuters, Travelers</a:t>
+            </a:r>
+            <a:r>
+              <a:rPr lang="en-US" sz="1150" b="1" i="0" dirty="0">
+                <a:solidFill>
+                  <a:srgbClr val="F5C842"/>
+                </a:solidFill>
+                <a:latin typeface="Calibri"/>
+              </a:rPr>
+              <a:t> &amp;</a:t>
+            </a:r>
+            <a:r>
+              <a:rPr sz="1150" b="1" i="0" dirty="0">
+                <a:solidFill>
+                  <a:srgbClr val="F5C842"/>
+                </a:solidFill>
+                <a:latin typeface="Calibri"/>
+              </a:rPr>
+              <a:t> Anyone Who Naps On the Move</a:t>
             </a:r>
           </a:p>
         </p:txBody>
@@ -3789,7 +3807,7 @@
                 </a:solidFill>
                 <a:latin typeface="Calibri"/>
               </a:rPr>
-              <a:t>1.117-20260703</a:t>
+              <a:t>1.130-20260709</a:t>
             </a:r>
             <a:endParaRPr sz="1150" b="1" i="0" dirty="0">
               <a:solidFill>
@@ -7818,8 +7836,8 @@
         </p:nvSpPr>
         <p:spPr>
           <a:xfrm>
-            <a:off x="4358487" y="4434840"/>
-            <a:ext cx="3474720" cy="566928"/>
+            <a:off x="4358487" y="4610582"/>
+            <a:ext cx="3474720" cy="215444"/>
           </a:xfrm>
           <a:prstGeom prst="rect">
             <a:avLst/>
@@ -7834,27 +7852,142 @@
           <a:p>
             <a:pPr algn="ctr"/>
             <a:r>
-              <a:rPr sz="1400" b="1" i="0" dirty="0">
+              <a:rPr lang="en-US" sz="1400" b="1" i="0" dirty="0">
                 <a:solidFill>
                   <a:srgbClr val="FFFFFF"/>
                 </a:solidFill>
                 <a:latin typeface="Calibri"/>
-              </a:rPr>
-              <a:t>Download </a:t>
-            </a:r>
-            <a:r>
-              <a:rPr sz="1400" b="1" i="0" dirty="0" err="1">
+                <a:hlinkClick r:id="rId3"/>
+              </a:rPr>
+              <a:t>Download GeoNap (iOS device)</a:t>
+            </a:r>
+            <a:r>
+              <a:rPr lang="en-US" sz="1400" b="1" i="0" dirty="0">
                 <a:solidFill>
                   <a:srgbClr val="FFFFFF"/>
                 </a:solidFill>
                 <a:latin typeface="Calibri"/>
               </a:rPr>
-              <a:t>GeoNap</a:t>
+              <a:t> **</a:t>
             </a:r>
             <a:endParaRPr sz="1400" b="1" i="0" dirty="0">
               <a:solidFill>
                 <a:srgbClr val="FFFFFF"/>
               </a:solidFill>
+              <a:latin typeface="Calibri"/>
+            </a:endParaRPr>
+          </a:p>
+        </p:txBody>
+      </p:sp>
+      <p:sp>
+        <p:nvSpPr>
+          <p:cNvPr id="7" name="TextBox 6">
+            <a:extLst>
+              <a:ext uri="{FF2B5EF4-FFF2-40B4-BE49-F238E27FC236}">
+                <a16:creationId xmlns:a16="http://schemas.microsoft.com/office/drawing/2014/main" id="{27815AFA-D1BA-67B5-F575-FB3E5A233B36}"/>
+              </a:ext>
+            </a:extLst>
+          </p:cNvPr>
+          <p:cNvSpPr txBox="1"/>
+          <p:nvPr/>
+        </p:nvSpPr>
+        <p:spPr>
+          <a:xfrm>
+            <a:off x="6229349" y="5570220"/>
+            <a:ext cx="5702139" cy="998350"/>
+          </a:xfrm>
+          <a:prstGeom prst="rect">
+            <a:avLst/>
+          </a:prstGeom>
+          <a:gradFill flip="none" rotWithShape="1">
+            <a:gsLst>
+              <a:gs pos="0">
+                <a:schemeClr val="accent1">
+                  <a:lumMod val="5000"/>
+                  <a:lumOff val="95000"/>
+                </a:schemeClr>
+              </a:gs>
+              <a:gs pos="74000">
+                <a:schemeClr val="accent1">
+                  <a:lumMod val="45000"/>
+                  <a:lumOff val="55000"/>
+                </a:schemeClr>
+              </a:gs>
+              <a:gs pos="83000">
+                <a:schemeClr val="accent1">
+                  <a:lumMod val="45000"/>
+                  <a:lumOff val="55000"/>
+                </a:schemeClr>
+              </a:gs>
+              <a:gs pos="100000">
+                <a:schemeClr val="accent1">
+                  <a:lumMod val="30000"/>
+                  <a:lumOff val="70000"/>
+                </a:schemeClr>
+              </a:gs>
+            </a:gsLst>
+            <a:lin ang="5400000" scaled="1"/>
+            <a:tileRect/>
+          </a:gradFill>
+        </p:spPr>
+        <p:txBody>
+          <a:bodyPr wrap="square" lIns="91440" tIns="91440" rIns="91440" bIns="91440" anchor="t">
+            <a:spAutoFit/>
+          </a:bodyPr>
+          <a:lstStyle/>
+          <a:p>
+            <a:pPr algn="r">
+              <a:lnSpc>
+                <a:spcPct val="120000"/>
+              </a:lnSpc>
+            </a:pPr>
+            <a:r>
+              <a:rPr lang="en-US" sz="1700" b="0" i="0" dirty="0">
+                <a:latin typeface="Calibri"/>
+              </a:rPr>
+              <a:t>** </a:t>
+            </a:r>
+            <a:r>
+              <a:rPr lang="en-US" sz="1400" b="0" i="0" dirty="0" err="1">
+                <a:latin typeface="Calibri"/>
+              </a:rPr>
+              <a:t>GeoNap</a:t>
+            </a:r>
+            <a:r>
+              <a:rPr lang="en-US" sz="1400" b="0" i="0" dirty="0">
+                <a:latin typeface="Calibri"/>
+              </a:rPr>
+              <a:t> is available in test mode only. As such, Apple requires installation of an app </a:t>
+            </a:r>
+            <a:r>
+              <a:rPr lang="en-US" sz="1400" b="0" i="0" dirty="0">
+                <a:solidFill>
+                  <a:srgbClr val="0070C0"/>
+                </a:solidFill>
+                <a:latin typeface="Calibri"/>
+                <a:hlinkClick r:id="rId4"/>
+              </a:rPr>
+              <a:t>“TestFlight” </a:t>
+            </a:r>
+            <a:r>
+              <a:rPr lang="en-US" sz="1400" b="0" i="0" dirty="0">
+                <a:latin typeface="Calibri"/>
+              </a:rPr>
+              <a:t>on their local iOS device. </a:t>
+            </a:r>
+            <a:r>
+              <a:rPr lang="en-US" sz="1400" b="0" i="0" dirty="0" err="1">
+                <a:latin typeface="Calibri"/>
+              </a:rPr>
+              <a:t>GeoNap</a:t>
+            </a:r>
+            <a:r>
+              <a:rPr lang="en-US" sz="1400" b="0" i="0" dirty="0">
+                <a:latin typeface="Calibri"/>
+              </a:rPr>
+              <a:t> installation, upgrades and feedback is done using the TestFlight application.</a:t>
+            </a:r>
+            <a:endParaRPr sz="1700" b="0" i="0" dirty="0">
               <a:latin typeface="Calibri"/>
             </a:endParaRPr>
           </a:p>

--- a/docs/GeoNap Presentations/GeoNap_Marketing_Deck.pptx
+++ b/docs/GeoNap Presentations/GeoNap_Marketing_Deck.pptx
@@ -318,7 +318,7 @@
           <a:p>
             <a:fld id="{5BCAD085-E8A6-8845-BD4E-CB4CCA059FC4}" type="datetimeFigureOut">
               <a:rPr lang="en-US" smtClean="0"/>
-              <a:t>7/10/26</a:t>
+              <a:t>7/11/26</a:t>
             </a:fld>
             <a:endParaRPr lang="en-US"/>
           </a:p>
@@ -486,7 +486,7 @@
           <a:p>
             <a:fld id="{5BCAD085-E8A6-8845-BD4E-CB4CCA059FC4}" type="datetimeFigureOut">
               <a:rPr lang="en-US" smtClean="0"/>
-              <a:t>7/10/26</a:t>
+              <a:t>7/11/26</a:t>
             </a:fld>
             <a:endParaRPr lang="en-US"/>
           </a:p>
@@ -664,7 +664,7 @@
           <a:p>
             <a:fld id="{5BCAD085-E8A6-8845-BD4E-CB4CCA059FC4}" type="datetimeFigureOut">
               <a:rPr lang="en-US" smtClean="0"/>
-              <a:t>7/10/26</a:t>
+              <a:t>7/11/26</a:t>
             </a:fld>
             <a:endParaRPr lang="en-US"/>
           </a:p>
@@ -832,7 +832,7 @@
           <a:p>
             <a:fld id="{5BCAD085-E8A6-8845-BD4E-CB4CCA059FC4}" type="datetimeFigureOut">
               <a:rPr lang="en-US" smtClean="0"/>
-              <a:t>7/10/26</a:t>
+              <a:t>7/11/26</a:t>
             </a:fld>
             <a:endParaRPr lang="en-US"/>
           </a:p>
@@ -1077,7 +1077,7 @@
           <a:p>
             <a:fld id="{5BCAD085-E8A6-8845-BD4E-CB4CCA059FC4}" type="datetimeFigureOut">
               <a:rPr lang="en-US" smtClean="0"/>
-              <a:t>7/10/26</a:t>
+              <a:t>7/11/26</a:t>
             </a:fld>
             <a:endParaRPr lang="en-US"/>
           </a:p>
@@ -1362,7 +1362,7 @@
           <a:p>
             <a:fld id="{5BCAD085-E8A6-8845-BD4E-CB4CCA059FC4}" type="datetimeFigureOut">
               <a:rPr lang="en-US" smtClean="0"/>
-              <a:t>7/10/26</a:t>
+              <a:t>7/11/26</a:t>
             </a:fld>
             <a:endParaRPr lang="en-US"/>
           </a:p>
@@ -1781,7 +1781,7 @@
           <a:p>
             <a:fld id="{5BCAD085-E8A6-8845-BD4E-CB4CCA059FC4}" type="datetimeFigureOut">
               <a:rPr lang="en-US" smtClean="0"/>
-              <a:t>7/10/26</a:t>
+              <a:t>7/11/26</a:t>
             </a:fld>
             <a:endParaRPr lang="en-US"/>
           </a:p>
@@ -1898,7 +1898,7 @@
           <a:p>
             <a:fld id="{5BCAD085-E8A6-8845-BD4E-CB4CCA059FC4}" type="datetimeFigureOut">
               <a:rPr lang="en-US" smtClean="0"/>
-              <a:t>7/10/26</a:t>
+              <a:t>7/11/26</a:t>
             </a:fld>
             <a:endParaRPr lang="en-US"/>
           </a:p>
@@ -1993,7 +1993,7 @@
           <a:p>
             <a:fld id="{5BCAD085-E8A6-8845-BD4E-CB4CCA059FC4}" type="datetimeFigureOut">
               <a:rPr lang="en-US" smtClean="0"/>
-              <a:t>7/10/26</a:t>
+              <a:t>7/11/26</a:t>
             </a:fld>
             <a:endParaRPr lang="en-US"/>
           </a:p>
@@ -2268,7 +2268,7 @@
           <a:p>
             <a:fld id="{5BCAD085-E8A6-8845-BD4E-CB4CCA059FC4}" type="datetimeFigureOut">
               <a:rPr lang="en-US" smtClean="0"/>
-              <a:t>7/10/26</a:t>
+              <a:t>7/11/26</a:t>
             </a:fld>
             <a:endParaRPr lang="en-US"/>
           </a:p>
@@ -2520,7 +2520,7 @@
           <a:p>
             <a:fld id="{5BCAD085-E8A6-8845-BD4E-CB4CCA059FC4}" type="datetimeFigureOut">
               <a:rPr lang="en-US" smtClean="0"/>
-              <a:t>7/10/26</a:t>
+              <a:t>7/11/26</a:t>
             </a:fld>
             <a:endParaRPr lang="en-US"/>
           </a:p>
@@ -2731,7 +2731,7 @@
           <a:p>
             <a:fld id="{5BCAD085-E8A6-8845-BD4E-CB4CCA059FC4}" type="datetimeFigureOut">
               <a:rPr lang="en-US" smtClean="0"/>
-              <a:t>7/10/26</a:t>
+              <a:t>7/11/26</a:t>
             </a:fld>
             <a:endParaRPr lang="en-US"/>
           </a:p>
@@ -3807,7 +3807,7 @@
                 </a:solidFill>
                 <a:latin typeface="Calibri"/>
               </a:rPr>
-              <a:t>1.130-20260709</a:t>
+              <a:t>1.157-20260711</a:t>
             </a:r>
             <a:endParaRPr sz="1150" b="1" i="0" dirty="0">
               <a:solidFill>
@@ -11469,7 +11469,7 @@
                 </a:solidFill>
                 <a:latin typeface="Cambria"/>
               </a:rPr>
-              <a:t>Arrive Home to Comfort</a:t>
+              <a:t>Run Any Shortcut</a:t>
             </a:r>
           </a:p>
         </p:txBody>
@@ -11502,13 +11502,31 @@
               </a:lnSpc>
             </a:pPr>
             <a:r>
-              <a:rPr sz="1200" b="0" i="0">
+              <a:rPr sz="1200" b="0" i="0" dirty="0">
                 <a:solidFill>
                   <a:srgbClr val="5C7182"/>
                 </a:solidFill>
                 <a:latin typeface="Calibri"/>
               </a:rPr>
-              <a:t>Trigger lights, heat, and air conditioning automatically as you approach — powered by HomeKit.</a:t>
+              <a:t>Trigger a Shortcut when you arrive — lights and heat, a </a:t>
+            </a:r>
+            <a:r>
+              <a:rPr lang="en-US" sz="1200" b="0" i="0" dirty="0">
+                <a:solidFill>
+                  <a:srgbClr val="5C7182"/>
+                </a:solidFill>
+                <a:latin typeface="Calibri"/>
+              </a:rPr>
+              <a:t>text</a:t>
+            </a:r>
+            <a:r>
+              <a:rPr sz="1200" b="0" i="0" dirty="0">
+                <a:solidFill>
+                  <a:srgbClr val="5C7182"/>
+                </a:solidFill>
+                <a:latin typeface="Calibri"/>
+              </a:rPr>
+              <a:t> to family, even a remote car start.</a:t>
             </a:r>
           </a:p>
         </p:txBody>
@@ -12843,7 +12861,7 @@
         <p:spPr>
           <a:xfrm>
             <a:off x="4800600" y="1965960"/>
-            <a:ext cx="6751015" cy="2926080"/>
+            <a:ext cx="6751015" cy="584006"/>
           </a:xfrm>
           <a:prstGeom prst="rect">
             <a:avLst/>
@@ -12862,13 +12880,67 @@
               </a:lnSpc>
             </a:pPr>
             <a:r>
-              <a:rPr sz="1500" b="0" i="0">
+              <a:rPr sz="1500" b="0" i="0" dirty="0">
                 <a:solidFill>
                   <a:srgbClr val="17303F"/>
                 </a:solidFill>
                 <a:latin typeface="Calibri"/>
               </a:rPr>
-              <a:t>As you approach your stop, GeoNap wakes you and triggers your home automation at the same moment — lights on, thermostat set, and everything ready before you walk in the door.</a:t>
+              <a:t>As you approach your stop, </a:t>
+            </a:r>
+            <a:r>
+              <a:rPr sz="1500" b="0" i="0" dirty="0" err="1">
+                <a:solidFill>
+                  <a:srgbClr val="17303F"/>
+                </a:solidFill>
+                <a:latin typeface="Calibri"/>
+              </a:rPr>
+              <a:t>GeoNap</a:t>
+            </a:r>
+            <a:r>
+              <a:rPr sz="1500" b="0" i="0" dirty="0">
+                <a:solidFill>
+                  <a:srgbClr val="17303F"/>
+                </a:solidFill>
+                <a:latin typeface="Calibri"/>
+              </a:rPr>
+              <a:t> wakes you and </a:t>
+            </a:r>
+            <a:r>
+              <a:rPr lang="en-US" sz="1500" b="0" i="0" dirty="0">
+                <a:solidFill>
+                  <a:srgbClr val="17303F"/>
+                </a:solidFill>
+                <a:latin typeface="Calibri"/>
+              </a:rPr>
+              <a:t>can </a:t>
+            </a:r>
+            <a:r>
+              <a:rPr sz="1500" b="0" i="0" dirty="0">
+                <a:solidFill>
+                  <a:srgbClr val="17303F"/>
+                </a:solidFill>
+                <a:latin typeface="Calibri"/>
+              </a:rPr>
+              <a:t>run </a:t>
+            </a:r>
+            <a:r>
+              <a:rPr lang="en-US" sz="1500" dirty="0">
+                <a:solidFill>
+                  <a:srgbClr val="17303F"/>
+                </a:solidFill>
+                <a:latin typeface="Calibri"/>
+              </a:rPr>
+              <a:t>any </a:t>
+            </a:r>
+            <a:r>
+              <a:rPr sz="1500" b="0" i="0" dirty="0">
+                <a:solidFill>
+                  <a:srgbClr val="17303F"/>
+                </a:solidFill>
+                <a:latin typeface="Calibri"/>
+              </a:rPr>
+              <a:t>Shortcut at the same moment — lights on, thermostat set, and everything ready before you walk in the door.</a:t>
             </a:r>
           </a:p>
         </p:txBody>
@@ -12935,7 +13007,7 @@
         <p:spPr>
           <a:xfrm>
             <a:off x="5074920" y="5239512"/>
-            <a:ext cx="5790895" cy="822960"/>
+            <a:ext cx="5790895" cy="434927"/>
           </a:xfrm>
           <a:prstGeom prst="rect">
             <a:avLst/>
@@ -12954,13 +13026,49 @@
               </a:lnSpc>
             </a:pPr>
             <a:r>
-              <a:rPr sz="1200" b="0" i="0">
+              <a:rPr sz="1200" b="0" i="0" dirty="0">
                 <a:solidFill>
                   <a:srgbClr val="5C7182"/>
                 </a:solidFill>
                 <a:latin typeface="Calibri"/>
               </a:rPr>
-              <a:t>Works with any HomeKit-compatible device via iOS Shortcuts: lights, thermostat, locks, blinds, and more.</a:t>
+              <a:t>Powered by any Shortcut you build — HomeKit scenes, a text to family, even a remote car start</a:t>
+            </a:r>
+            <a:r>
+              <a:rPr lang="en-US" sz="1200" b="0" i="0" dirty="0">
+                <a:solidFill>
+                  <a:srgbClr val="5C7182"/>
+                </a:solidFill>
+                <a:latin typeface="Calibri"/>
+              </a:rPr>
+              <a:t>, any application that support Apple shortcuts</a:t>
+            </a:r>
+            <a:r>
+              <a:rPr sz="1200" b="0" i="0" dirty="0">
+                <a:solidFill>
+                  <a:srgbClr val="5C7182"/>
+                </a:solidFill>
+                <a:latin typeface="Calibri"/>
+              </a:rPr>
+              <a:t>. </a:t>
+            </a:r>
+            <a:r>
+              <a:rPr sz="1200" b="0" i="0" dirty="0" err="1">
+                <a:solidFill>
+                  <a:srgbClr val="5C7182"/>
+                </a:solidFill>
+                <a:latin typeface="Calibri"/>
+              </a:rPr>
+              <a:t>GeoNap</a:t>
+            </a:r>
+            <a:r>
+              <a:rPr sz="1200" b="0" i="0" dirty="0">
+                <a:solidFill>
+                  <a:srgbClr val="5C7182"/>
+                </a:solidFill>
+                <a:latin typeface="Calibri"/>
+              </a:rPr>
+              <a:t> just needs its name.</a:t>
             </a:r>
           </a:p>
         </p:txBody>

--- a/docs/GeoNap Presentations/GeoNap_Marketing_Deck.pptx
+++ b/docs/GeoNap Presentations/GeoNap_Marketing_Deck.pptx
@@ -21,7 +21,8 @@
     <p:sldId id="269" r:id="rId15"/>
     <p:sldId id="270" r:id="rId16"/>
     <p:sldId id="271" r:id="rId17"/>
-    <p:sldId id="272" r:id="rId18"/>
+    <p:sldId id="273" r:id="rId18"/>
+    <p:sldId id="272" r:id="rId19"/>
   </p:sldIdLst>
   <p:sldSz cx="12192000" cy="6858000"/>
   <p:notesSz cx="6858000" cy="9144000"/>
@@ -7659,6 +7660,1023 @@
 </file>
 
 <file path=ppt/slides/slide17.xml><?xml version="1.0" encoding="utf-8"?>
+<p:sld xmlns:a="http://schemas.openxmlformats.org/drawingml/2006/main" xmlns:r="http://schemas.openxmlformats.org/officeDocument/2006/relationships" xmlns:p="http://schemas.openxmlformats.org/presentationml/2006/main">
+  <p:cSld>
+    <p:bg>
+      <p:bgPr>
+        <a:solidFill>
+          <a:srgbClr val="F6F7F9"/>
+        </a:solidFill>
+        <a:effectLst/>
+      </p:bgPr>
+    </p:bg>
+    <p:spTree>
+      <p:nvGrpSpPr>
+        <p:cNvPr id="1" name=""/>
+        <p:cNvGrpSpPr/>
+        <p:nvPr/>
+      </p:nvGrpSpPr>
+      <p:grpSpPr>
+        <a:xfrm>
+          <a:off x="0" y="0"/>
+          <a:ext cx="0" cy="0"/>
+          <a:chOff x="0" y="0"/>
+          <a:chExt cx="0" cy="0"/>
+        </a:xfrm>
+      </p:grpSpPr>
+      <p:sp>
+        <p:nvSpPr>
+          <p:cNvPr id="2" name="TextBox 1"/>
+          <p:cNvSpPr txBox="1"/>
+          <p:nvPr/>
+        </p:nvSpPr>
+        <p:spPr>
+          <a:xfrm>
+            <a:off x="548640" y="457200"/>
+            <a:ext cx="7315200" cy="320040"/>
+          </a:xfrm>
+          <a:prstGeom prst="rect">
+            <a:avLst/>
+          </a:prstGeom>
+          <a:noFill/>
+        </p:spPr>
+        <p:txBody>
+          <a:bodyPr wrap="square" lIns="0" tIns="0" rIns="0" bIns="0" anchor="t">
+            <a:spAutoFit/>
+          </a:bodyPr>
+          <a:lstStyle/>
+          <a:p>
+            <a:pPr algn="l"/>
+            <a:r>
+              <a:rPr sz="1300" b="1" i="0" spc="160">
+                <a:solidFill>
+                  <a:srgbClr val="C89E28"/>
+                </a:solidFill>
+                <a:latin typeface="Calibri"/>
+              </a:rPr>
+              <a:t>PRICING</a:t>
+            </a:r>
+          </a:p>
+        </p:txBody>
+      </p:sp>
+      <p:sp>
+        <p:nvSpPr>
+          <p:cNvPr id="3" name="TextBox 2"/>
+          <p:cNvSpPr txBox="1"/>
+          <p:nvPr/>
+        </p:nvSpPr>
+        <p:spPr>
+          <a:xfrm>
+            <a:off x="548640" y="749808"/>
+            <a:ext cx="9997135" cy="822960"/>
+          </a:xfrm>
+          <a:prstGeom prst="rect">
+            <a:avLst/>
+          </a:prstGeom>
+          <a:noFill/>
+        </p:spPr>
+        <p:txBody>
+          <a:bodyPr wrap="square" lIns="0" tIns="0" rIns="0" bIns="0" anchor="t">
+            <a:spAutoFit/>
+          </a:bodyPr>
+          <a:lstStyle/>
+          <a:p>
+            <a:pPr algn="l">
+              <a:lnSpc>
+                <a:spcPct val="102000"/>
+              </a:lnSpc>
+            </a:pPr>
+            <a:r>
+              <a:rPr sz="3000" b="1" i="0">
+                <a:solidFill>
+                  <a:srgbClr val="1A3A52"/>
+                </a:solidFill>
+                <a:latin typeface="Cambria"/>
+              </a:rPr>
+              <a:t>Simple Plans for Every Traveler</a:t>
+            </a:r>
+          </a:p>
+        </p:txBody>
+      </p:sp>
+      <p:graphicFrame>
+        <p:nvGraphicFramePr>
+          <p:cNvPr id="4" name="Table 3"/>
+          <p:cNvGraphicFramePr>
+            <a:graphicFrameLocks noGrp="1"/>
+          </p:cNvGraphicFramePr>
+          <p:nvPr>
+            <p:extLst>
+              <p:ext uri="{D42A27DB-BD31-4B8C-83A1-F6EECF244321}">
+                <p14:modId xmlns:p14="http://schemas.microsoft.com/office/powerpoint/2010/main" val="914684238"/>
+              </p:ext>
+            </p:extLst>
+          </p:nvPr>
+        </p:nvGraphicFramePr>
+        <p:xfrm>
+          <a:off x="548640" y="1700000"/>
+          <a:ext cx="11091672" cy="4484012"/>
+        </p:xfrm>
+        <a:graphic>
+          <a:graphicData uri="http://schemas.openxmlformats.org/drawingml/2006/table">
+            <a:tbl>
+              <a:tblPr firstRow="1" bandRow="1">
+                <a:tableStyleId>{5C22544A-7EE6-4342-B048-85BDC9FD1C3A}</a:tableStyleId>
+              </a:tblPr>
+              <a:tblGrid>
+                <a:gridCol w="2743200">
+                  <a:extLst>
+                    <a:ext uri="{9D8B030D-6E8A-4147-A177-3AD203B41FA5}">
+                      <a16:colId xmlns:a16="http://schemas.microsoft.com/office/drawing/2014/main" val="20000"/>
+                    </a:ext>
+                  </a:extLst>
+                </a:gridCol>
+                <a:gridCol w="8348472">
+                  <a:extLst>
+                    <a:ext uri="{9D8B030D-6E8A-4147-A177-3AD203B41FA5}">
+                      <a16:colId xmlns:a16="http://schemas.microsoft.com/office/drawing/2014/main" val="20001"/>
+                    </a:ext>
+                  </a:extLst>
+                </a:gridCol>
+              </a:tblGrid>
+              <a:tr h="480000">
+                <a:tc>
+                  <a:txBody>
+                    <a:bodyPr/>
+                    <a:lstStyle/>
+                    <a:p>
+                      <a:pPr>
+                        <a:defRPr sz="1300" b="1">
+                          <a:solidFill>
+                            <a:srgbClr val="FFFFFF"/>
+                          </a:solidFill>
+                          <a:latin typeface="Calibri"/>
+                        </a:defRPr>
+                      </a:pPr>
+                      <a:r>
+                        <a:t>Plan</a:t>
+                      </a:r>
+                    </a:p>
+                  </a:txBody>
+                  <a:tcPr marL="109728" marT="54864" marB="54864" anchor="ctr">
+                    <a:solidFill>
+                      <a:srgbClr val="1A3A52"/>
+                    </a:solidFill>
+                  </a:tcPr>
+                </a:tc>
+                <a:tc>
+                  <a:txBody>
+                    <a:bodyPr/>
+                    <a:lstStyle/>
+                    <a:p>
+                      <a:pPr>
+                        <a:defRPr sz="1300" b="1">
+                          <a:solidFill>
+                            <a:srgbClr val="FFFFFF"/>
+                          </a:solidFill>
+                          <a:latin typeface="Calibri"/>
+                        </a:defRPr>
+                      </a:pPr>
+                      <a:r>
+                        <a:t>What's Included</a:t>
+                      </a:r>
+                    </a:p>
+                  </a:txBody>
+                  <a:tcPr marL="109728" marT="54864" marB="54864" anchor="ctr">
+                    <a:solidFill>
+                      <a:srgbClr val="1A3A52"/>
+                    </a:solidFill>
+                  </a:tcPr>
+                </a:tc>
+                <a:extLst>
+                  <a:ext uri="{0D108BD9-81ED-4DB2-BD59-A6C34878D82A}">
+                    <a16:rowId xmlns:a16="http://schemas.microsoft.com/office/drawing/2014/main" val="10000"/>
+                  </a:ext>
+                </a:extLst>
+              </a:tr>
+              <a:tr h="860000">
+                <a:tc>
+                  <a:txBody>
+                    <a:bodyPr/>
+                    <a:lstStyle/>
+                    <a:p>
+                      <a:pPr>
+                        <a:spcAft>
+                          <a:spcPts val="200"/>
+                        </a:spcAft>
+                        <a:defRPr sz="1400" b="1">
+                          <a:solidFill>
+                            <a:srgbClr val="17303F"/>
+                          </a:solidFill>
+                          <a:latin typeface="Cambria"/>
+                        </a:defRPr>
+                      </a:pPr>
+                      <a:r>
+                        <a:t>Free</a:t>
+                      </a:r>
+                    </a:p>
+                    <a:p>
+                      <a:pPr>
+                        <a:defRPr sz="1150" b="0">
+                          <a:solidFill>
+                            <a:srgbClr val="5C7182"/>
+                          </a:solidFill>
+                          <a:latin typeface="Calibri"/>
+                        </a:defRPr>
+                      </a:pPr>
+                      <a:r>
+                        <a:t>$0</a:t>
+                      </a:r>
+                    </a:p>
+                  </a:txBody>
+                  <a:tcPr marL="109728" marT="73152" marB="73152" anchor="ctr">
+                    <a:solidFill>
+                      <a:srgbClr val="FFFFFF"/>
+                    </a:solidFill>
+                  </a:tcPr>
+                </a:tc>
+                <a:tc>
+                  <a:txBody>
+                    <a:bodyPr/>
+                    <a:lstStyle/>
+                    <a:p>
+                      <a:pPr marL="171450" indent="-171450">
+                        <a:spcAft>
+                          <a:spcPts val="150"/>
+                        </a:spcAft>
+                        <a:buFont typeface="Arial"/>
+                        <a:buChar char="•"/>
+                      </a:pPr>
+                      <a:r>
+                        <a:rPr lang="en-US" sz="1050" b="0" dirty="0">
+                          <a:solidFill>
+                            <a:srgbClr val="17303F"/>
+                          </a:solidFill>
+                          <a:latin typeface="Calibri"/>
+                        </a:rPr>
+                        <a:t>Location</a:t>
+                      </a:r>
+                      <a:r>
+                        <a:rPr sz="1050" b="0" dirty="0">
+                          <a:solidFill>
+                            <a:srgbClr val="17303F"/>
+                          </a:solidFill>
+                          <a:latin typeface="Calibri"/>
+                        </a:rPr>
+                        <a:t> alarm</a:t>
+                      </a:r>
+                      <a:r>
+                        <a:rPr lang="en-US" sz="1050" b="0" dirty="0">
+                          <a:solidFill>
+                            <a:srgbClr val="17303F"/>
+                          </a:solidFill>
+                          <a:latin typeface="Calibri"/>
+                        </a:rPr>
+                        <a:t> only (no support for time based or Transit alarm creation)</a:t>
+                      </a:r>
+                      <a:endParaRPr sz="1050" b="0" dirty="0">
+                        <a:solidFill>
+                          <a:srgbClr val="17303F"/>
+                        </a:solidFill>
+                        <a:latin typeface="Calibri"/>
+                      </a:endParaRPr>
+                    </a:p>
+                    <a:p>
+                      <a:pPr marL="171450" indent="-171450">
+                        <a:spcAft>
+                          <a:spcPts val="150"/>
+                        </a:spcAft>
+                        <a:buFont typeface="Arial"/>
+                        <a:buChar char="•"/>
+                      </a:pPr>
+                      <a:r>
+                        <a:rPr sz="1050" b="0" dirty="0">
+                          <a:solidFill>
+                            <a:srgbClr val="17303F"/>
+                          </a:solidFill>
+                          <a:latin typeface="Calibri"/>
+                        </a:rPr>
+                        <a:t>One active alarm (distance-based)</a:t>
+                      </a:r>
+                    </a:p>
+                    <a:p>
+                      <a:pPr marL="171450" indent="-171450">
+                        <a:spcAft>
+                          <a:spcPts val="150"/>
+                        </a:spcAft>
+                        <a:buFont typeface="Arial"/>
+                        <a:buChar char="•"/>
+                      </a:pPr>
+                      <a:r>
+                        <a:rPr sz="1050" b="0" dirty="0">
+                          <a:solidFill>
+                            <a:srgbClr val="17303F"/>
+                          </a:solidFill>
+                          <a:latin typeface="Calibri"/>
+                        </a:rPr>
+                        <a:t>Default alarm sounds</a:t>
+                      </a:r>
+                    </a:p>
+                  </a:txBody>
+                  <a:tcPr marL="109728" marT="73152" marB="73152" anchor="ctr">
+                    <a:solidFill>
+                      <a:srgbClr val="FFFFFF"/>
+                    </a:solidFill>
+                  </a:tcPr>
+                </a:tc>
+                <a:extLst>
+                  <a:ext uri="{0D108BD9-81ED-4DB2-BD59-A6C34878D82A}">
+                    <a16:rowId xmlns:a16="http://schemas.microsoft.com/office/drawing/2014/main" val="10001"/>
+                  </a:ext>
+                </a:extLst>
+              </a:tr>
+              <a:tr h="860000">
+                <a:tc>
+                  <a:txBody>
+                    <a:bodyPr/>
+                    <a:lstStyle/>
+                    <a:p>
+                      <a:pPr>
+                        <a:spcAft>
+                          <a:spcPts val="200"/>
+                        </a:spcAft>
+                        <a:defRPr sz="1400" b="1">
+                          <a:solidFill>
+                            <a:srgbClr val="17303F"/>
+                          </a:solidFill>
+                          <a:latin typeface="Cambria"/>
+                        </a:defRPr>
+                      </a:pPr>
+                      <a:r>
+                        <a:t>Standard</a:t>
+                      </a:r>
+                    </a:p>
+                    <a:p>
+                      <a:pPr>
+                        <a:defRPr sz="1150" b="0">
+                          <a:solidFill>
+                            <a:srgbClr val="5C7182"/>
+                          </a:solidFill>
+                          <a:latin typeface="Calibri"/>
+                        </a:defRPr>
+                      </a:pPr>
+                      <a:r>
+                        <a:t>$2.99 / year</a:t>
+                      </a:r>
+                    </a:p>
+                  </a:txBody>
+                  <a:tcPr marL="109728" marT="73152" marB="73152" anchor="ctr">
+                    <a:solidFill>
+                      <a:srgbClr val="EFF2F5"/>
+                    </a:solidFill>
+                  </a:tcPr>
+                </a:tc>
+                <a:tc>
+                  <a:txBody>
+                    <a:bodyPr/>
+                    <a:lstStyle/>
+                    <a:p>
+                      <a:pPr>
+                        <a:spcAft>
+                          <a:spcPts val="150"/>
+                        </a:spcAft>
+                        <a:buNone/>
+                      </a:pPr>
+                      <a:r>
+                        <a:rPr sz="1050" b="1" i="1" dirty="0">
+                          <a:solidFill>
+                            <a:srgbClr val="5C7182"/>
+                          </a:solidFill>
+                          <a:latin typeface="Calibri"/>
+                        </a:rPr>
+                        <a:t>Everything in Free, plus:</a:t>
+                      </a:r>
+                    </a:p>
+                    <a:p>
+                      <a:pPr marL="171450" indent="-171450">
+                        <a:spcAft>
+                          <a:spcPts val="150"/>
+                        </a:spcAft>
+                        <a:buFont typeface="Arial"/>
+                        <a:buChar char="•"/>
+                      </a:pPr>
+                      <a:r>
+                        <a:rPr sz="1050" b="0" dirty="0">
+                          <a:solidFill>
+                            <a:srgbClr val="17303F"/>
+                          </a:solidFill>
+                          <a:latin typeface="Calibri"/>
+                        </a:rPr>
+                        <a:t>Unlimited simultaneous alarms</a:t>
+                      </a:r>
+                      <a:r>
+                        <a:rPr lang="en-US" sz="1050" b="0" dirty="0">
+                          <a:solidFill>
+                            <a:srgbClr val="17303F"/>
+                          </a:solidFill>
+                          <a:latin typeface="Calibri"/>
+                        </a:rPr>
+                        <a:t> (Location only)</a:t>
+                      </a:r>
+                      <a:endParaRPr sz="1050" b="0" dirty="0">
+                        <a:solidFill>
+                          <a:srgbClr val="17303F"/>
+                        </a:solidFill>
+                        <a:latin typeface="Calibri"/>
+                      </a:endParaRPr>
+                    </a:p>
+                    <a:p>
+                      <a:pPr marL="171450" indent="-171450">
+                        <a:spcAft>
+                          <a:spcPts val="150"/>
+                        </a:spcAft>
+                        <a:buFont typeface="Arial"/>
+                        <a:buChar char="•"/>
+                      </a:pPr>
+                      <a:r>
+                        <a:rPr sz="1050" b="0" dirty="0">
+                          <a:solidFill>
+                            <a:srgbClr val="17303F"/>
+                          </a:solidFill>
+                          <a:latin typeface="Calibri"/>
+                        </a:rPr>
+                        <a:t>Full sound library</a:t>
+                      </a:r>
+                    </a:p>
+                    <a:p>
+                      <a:pPr marL="171450" indent="-171450">
+                        <a:spcAft>
+                          <a:spcPts val="150"/>
+                        </a:spcAft>
+                        <a:buFont typeface="Arial"/>
+                        <a:buChar char="•"/>
+                      </a:pPr>
+                      <a:r>
+                        <a:rPr sz="1050" b="0" dirty="0">
+                          <a:solidFill>
+                            <a:srgbClr val="17303F"/>
+                          </a:solidFill>
+                          <a:latin typeface="Calibri"/>
+                        </a:rPr>
+                        <a:t>Contact notify (prompted SMS)</a:t>
+                      </a:r>
+                    </a:p>
+                    <a:p>
+                      <a:pPr marL="171450" indent="-171450">
+                        <a:spcAft>
+                          <a:spcPts val="150"/>
+                        </a:spcAft>
+                        <a:buFont typeface="Arial"/>
+                        <a:buChar char="•"/>
+                      </a:pPr>
+                      <a:r>
+                        <a:rPr lang="en-US" sz="1050" b="0" dirty="0">
+                          <a:solidFill>
+                            <a:srgbClr val="17303F"/>
+                          </a:solidFill>
+                          <a:latin typeface="Calibri"/>
+                        </a:rPr>
+                        <a:t>Control over alarm a</a:t>
+                      </a:r>
+                      <a:r>
+                        <a:rPr sz="1050" b="0" dirty="0">
+                          <a:solidFill>
+                            <a:srgbClr val="17303F"/>
+                          </a:solidFill>
+                          <a:latin typeface="Calibri"/>
+                        </a:rPr>
+                        <a:t>ctive time windows</a:t>
+                      </a:r>
+                    </a:p>
+                  </a:txBody>
+                  <a:tcPr marL="109728" marT="73152" marB="73152" anchor="ctr">
+                    <a:solidFill>
+                      <a:srgbClr val="EFF2F5"/>
+                    </a:solidFill>
+                  </a:tcPr>
+                </a:tc>
+                <a:extLst>
+                  <a:ext uri="{0D108BD9-81ED-4DB2-BD59-A6C34878D82A}">
+                    <a16:rowId xmlns:a16="http://schemas.microsoft.com/office/drawing/2014/main" val="10002"/>
+                  </a:ext>
+                </a:extLst>
+              </a:tr>
+              <a:tr h="860000">
+                <a:tc>
+                  <a:txBody>
+                    <a:bodyPr/>
+                    <a:lstStyle/>
+                    <a:p>
+                      <a:pPr>
+                        <a:spcAft>
+                          <a:spcPts val="200"/>
+                        </a:spcAft>
+                        <a:defRPr sz="1400" b="1">
+                          <a:solidFill>
+                            <a:srgbClr val="17303F"/>
+                          </a:solidFill>
+                          <a:latin typeface="Cambria"/>
+                        </a:defRPr>
+                      </a:pPr>
+                      <a:r>
+                        <a:t>Silver</a:t>
+                      </a:r>
+                    </a:p>
+                    <a:p>
+                      <a:pPr>
+                        <a:defRPr sz="1150" b="0">
+                          <a:solidFill>
+                            <a:srgbClr val="5C7182"/>
+                          </a:solidFill>
+                          <a:latin typeface="Calibri"/>
+                        </a:defRPr>
+                      </a:pPr>
+                      <a:r>
+                        <a:t>$6.99 / year</a:t>
+                      </a:r>
+                    </a:p>
+                  </a:txBody>
+                  <a:tcPr marL="109728" marT="73152" marB="73152" anchor="ctr">
+                    <a:solidFill>
+                      <a:srgbClr val="FFFFFF"/>
+                    </a:solidFill>
+                  </a:tcPr>
+                </a:tc>
+                <a:tc>
+                  <a:txBody>
+                    <a:bodyPr/>
+                    <a:lstStyle/>
+                    <a:p>
+                      <a:pPr>
+                        <a:spcAft>
+                          <a:spcPts val="150"/>
+                        </a:spcAft>
+                        <a:buNone/>
+                      </a:pPr>
+                      <a:r>
+                        <a:rPr sz="1050" b="1" i="1" dirty="0">
+                          <a:solidFill>
+                            <a:srgbClr val="5C7182"/>
+                          </a:solidFill>
+                          <a:latin typeface="Calibri"/>
+                        </a:rPr>
+                        <a:t>Everything in Standard, plus:</a:t>
+                      </a:r>
+                    </a:p>
+                    <a:p>
+                      <a:pPr marL="171450" indent="-171450">
+                        <a:spcAft>
+                          <a:spcPts val="150"/>
+                        </a:spcAft>
+                        <a:buFont typeface="Arial"/>
+                        <a:buChar char="•"/>
+                      </a:pPr>
+                      <a:r>
+                        <a:rPr sz="1050" b="0" dirty="0">
+                          <a:solidFill>
+                            <a:srgbClr val="17303F"/>
+                          </a:solidFill>
+                          <a:latin typeface="Calibri"/>
+                        </a:rPr>
+                        <a:t>Time-based alarms</a:t>
+                      </a:r>
+                    </a:p>
+                    <a:p>
+                      <a:pPr marL="171450" indent="-171450">
+                        <a:spcAft>
+                          <a:spcPts val="150"/>
+                        </a:spcAft>
+                        <a:buFont typeface="Arial"/>
+                        <a:buChar char="•"/>
+                      </a:pPr>
+                      <a:r>
+                        <a:rPr sz="1050" b="0" dirty="0">
+                          <a:solidFill>
+                            <a:srgbClr val="17303F"/>
+                          </a:solidFill>
+                          <a:latin typeface="Calibri"/>
+                        </a:rPr>
+                        <a:t>Transit agency integration + caching</a:t>
+                      </a:r>
+                    </a:p>
+                    <a:p>
+                      <a:pPr marL="171450" indent="-171450">
+                        <a:spcAft>
+                          <a:spcPts val="150"/>
+                        </a:spcAft>
+                        <a:buFont typeface="Arial"/>
+                        <a:buChar char="•"/>
+                      </a:pPr>
+                      <a:r>
+                        <a:rPr sz="1050" b="0" dirty="0">
+                          <a:solidFill>
+                            <a:srgbClr val="17303F"/>
+                          </a:solidFill>
+                          <a:latin typeface="Calibri"/>
+                        </a:rPr>
+                        <a:t>Hands-free Auto-SMS / Notify Contacts</a:t>
+                      </a:r>
+                    </a:p>
+                    <a:p>
+                      <a:pPr marL="171450" indent="-171450">
+                        <a:spcAft>
+                          <a:spcPts val="150"/>
+                        </a:spcAft>
+                        <a:buFont typeface="Arial"/>
+                        <a:buChar char="•"/>
+                      </a:pPr>
+                      <a:r>
+                        <a:rPr sz="1050" b="0" dirty="0">
+                          <a:solidFill>
+                            <a:srgbClr val="17303F"/>
+                          </a:solidFill>
+                          <a:latin typeface="Calibri"/>
+                        </a:rPr>
+                        <a:t>Repeat &amp; per-day scheduling</a:t>
+                      </a:r>
+                    </a:p>
+                  </a:txBody>
+                  <a:tcPr marL="109728" marT="73152" marB="73152" anchor="ctr">
+                    <a:solidFill>
+                      <a:srgbClr val="FFFFFF"/>
+                    </a:solidFill>
+                  </a:tcPr>
+                </a:tc>
+                <a:extLst>
+                  <a:ext uri="{0D108BD9-81ED-4DB2-BD59-A6C34878D82A}">
+                    <a16:rowId xmlns:a16="http://schemas.microsoft.com/office/drawing/2014/main" val="10003"/>
+                  </a:ext>
+                </a:extLst>
+              </a:tr>
+              <a:tr h="860000">
+                <a:tc>
+                  <a:txBody>
+                    <a:bodyPr/>
+                    <a:lstStyle/>
+                    <a:p>
+                      <a:pPr>
+                        <a:spcAft>
+                          <a:spcPts val="200"/>
+                        </a:spcAft>
+                        <a:defRPr sz="1400" b="1">
+                          <a:solidFill>
+                            <a:srgbClr val="17303F"/>
+                          </a:solidFill>
+                          <a:latin typeface="Cambria"/>
+                        </a:defRPr>
+                      </a:pPr>
+                      <a:r>
+                        <a:rPr dirty="0"/>
+                        <a:t>Gold</a:t>
+                      </a:r>
+                    </a:p>
+                    <a:p>
+                      <a:pPr>
+                        <a:defRPr sz="1150" b="0">
+                          <a:solidFill>
+                            <a:srgbClr val="5C7182"/>
+                          </a:solidFill>
+                          <a:latin typeface="Calibri"/>
+                        </a:defRPr>
+                      </a:pPr>
+                      <a:r>
+                        <a:rPr dirty="0"/>
+                        <a:t>$12.99 lifetime</a:t>
+                      </a:r>
+                    </a:p>
+                  </a:txBody>
+                  <a:tcPr marL="109728" marT="73152" marB="73152" anchor="ctr">
+                    <a:solidFill>
+                      <a:srgbClr val="EFF2F5"/>
+                    </a:solidFill>
+                  </a:tcPr>
+                </a:tc>
+                <a:tc>
+                  <a:txBody>
+                    <a:bodyPr/>
+                    <a:lstStyle/>
+                    <a:p>
+                      <a:pPr>
+                        <a:spcAft>
+                          <a:spcPts val="150"/>
+                        </a:spcAft>
+                        <a:buNone/>
+                      </a:pPr>
+                      <a:r>
+                        <a:rPr sz="1050" b="1" i="1" dirty="0">
+                          <a:solidFill>
+                            <a:srgbClr val="5C7182"/>
+                          </a:solidFill>
+                          <a:latin typeface="Calibri"/>
+                        </a:rPr>
+                        <a:t>Everything in Silver, plus:</a:t>
+                      </a:r>
+                    </a:p>
+                    <a:p>
+                      <a:pPr marL="171450" indent="-171450">
+                        <a:spcAft>
+                          <a:spcPts val="150"/>
+                        </a:spcAft>
+                        <a:buFont typeface="Arial"/>
+                        <a:buChar char="•"/>
+                      </a:pPr>
+                      <a:r>
+                        <a:rPr sz="1050" b="0" dirty="0">
+                          <a:solidFill>
+                            <a:srgbClr val="17303F"/>
+                          </a:solidFill>
+                          <a:latin typeface="Calibri"/>
+                        </a:rPr>
+                        <a:t>Calendar-scan auto-scheduling</a:t>
+                      </a:r>
+                    </a:p>
+                    <a:p>
+                      <a:pPr marL="171450" indent="-171450">
+                        <a:spcAft>
+                          <a:spcPts val="150"/>
+                        </a:spcAft>
+                        <a:buFont typeface="Arial"/>
+                        <a:buChar char="•"/>
+                      </a:pPr>
+                      <a:r>
+                        <a:rPr lang="en-US" sz="1050" b="0" dirty="0">
+                          <a:solidFill>
+                            <a:srgbClr val="17303F"/>
+                          </a:solidFill>
+                          <a:latin typeface="Calibri"/>
+                        </a:rPr>
+                        <a:t>Live alarms, see </a:t>
+                      </a:r>
+                      <a:r>
+                        <a:rPr lang="en-US" sz="1050" dirty="0"/>
+                        <a:t>distance/ETA progress tied to your GPS position</a:t>
+                      </a:r>
+                      <a:endParaRPr sz="1050" b="0" dirty="0">
+                        <a:solidFill>
+                          <a:srgbClr val="17303F"/>
+                        </a:solidFill>
+                        <a:latin typeface="Calibri"/>
+                      </a:endParaRPr>
+                    </a:p>
+                    <a:p>
+                      <a:pPr marL="171450" indent="-171450">
+                        <a:spcAft>
+                          <a:spcPts val="150"/>
+                        </a:spcAft>
+                        <a:buFont typeface="Arial"/>
+                        <a:buChar char="•"/>
+                      </a:pPr>
+                      <a:r>
+                        <a:rPr sz="1050" b="0" dirty="0">
+                          <a:solidFill>
+                            <a:srgbClr val="17303F"/>
+                          </a:solidFill>
+                          <a:latin typeface="Calibri"/>
+                        </a:rPr>
+                        <a:t>Priority transit feed support</a:t>
+                      </a:r>
+                    </a:p>
+                    <a:p>
+                      <a:pPr marL="171450" indent="-171450">
+                        <a:spcAft>
+                          <a:spcPts val="150"/>
+                        </a:spcAft>
+                        <a:buFont typeface="Arial"/>
+                        <a:buChar char="•"/>
+                      </a:pPr>
+                      <a:r>
+                        <a:rPr sz="1050" b="0" dirty="0">
+                          <a:solidFill>
+                            <a:srgbClr val="17303F"/>
+                          </a:solidFill>
+                          <a:latin typeface="Calibri"/>
+                        </a:rPr>
+                        <a:t>Full </a:t>
+                      </a:r>
+                      <a:r>
+                        <a:rPr lang="en-US" sz="1050" b="0" dirty="0">
+                          <a:solidFill>
+                            <a:srgbClr val="17303F"/>
+                          </a:solidFill>
+                          <a:latin typeface="Calibri"/>
+                        </a:rPr>
+                        <a:t>integration support with other Apps  that support </a:t>
+                      </a:r>
+                      <a:r>
+                        <a:rPr sz="1050" b="0" dirty="0">
+                          <a:solidFill>
+                            <a:srgbClr val="17303F"/>
+                          </a:solidFill>
+                          <a:latin typeface="Calibri"/>
+                        </a:rPr>
+                        <a:t>Shortcuts</a:t>
+                      </a:r>
+                      <a:r>
+                        <a:rPr lang="en-US" sz="1050" b="0" dirty="0">
+                          <a:solidFill>
+                            <a:srgbClr val="17303F"/>
+                          </a:solidFill>
+                          <a:latin typeface="Calibri"/>
+                        </a:rPr>
+                        <a:t> </a:t>
+                      </a:r>
+                      <a:r>
+                        <a:rPr sz="1050" b="0" dirty="0">
+                          <a:solidFill>
+                            <a:srgbClr val="17303F"/>
+                          </a:solidFill>
+                          <a:latin typeface="Calibri"/>
+                        </a:rPr>
+                        <a:t>+ enhanced Dead Reckoning</a:t>
+                      </a:r>
+                      <a:r>
+                        <a:rPr lang="en-US" sz="1050" b="0" dirty="0">
+                          <a:solidFill>
+                            <a:srgbClr val="17303F"/>
+                          </a:solidFill>
+                          <a:latin typeface="Calibri"/>
+                        </a:rPr>
+                        <a:t> for Time-based alarms.</a:t>
+                      </a:r>
+                      <a:endParaRPr sz="1050" b="0" dirty="0">
+                        <a:solidFill>
+                          <a:srgbClr val="17303F"/>
+                        </a:solidFill>
+                        <a:latin typeface="Calibri"/>
+                      </a:endParaRPr>
+                    </a:p>
+                  </a:txBody>
+                  <a:tcPr marL="109728" marT="73152" marB="73152" anchor="ctr">
+                    <a:solidFill>
+                      <a:srgbClr val="EFF2F5"/>
+                    </a:solidFill>
+                  </a:tcPr>
+                </a:tc>
+                <a:extLst>
+                  <a:ext uri="{0D108BD9-81ED-4DB2-BD59-A6C34878D82A}">
+                    <a16:rowId xmlns:a16="http://schemas.microsoft.com/office/drawing/2014/main" val="10004"/>
+                  </a:ext>
+                </a:extLst>
+              </a:tr>
+            </a:tbl>
+          </a:graphicData>
+        </a:graphic>
+      </p:graphicFrame>
+      <p:sp>
+        <p:nvSpPr>
+          <p:cNvPr id="5" name="TextBox 4"/>
+          <p:cNvSpPr txBox="1"/>
+          <p:nvPr/>
+        </p:nvSpPr>
+        <p:spPr>
+          <a:xfrm>
+            <a:off x="9944100" y="6199631"/>
+            <a:ext cx="1698955" cy="169277"/>
+          </a:xfrm>
+          <a:prstGeom prst="rect">
+            <a:avLst/>
+          </a:prstGeom>
+          <a:noFill/>
+        </p:spPr>
+        <p:txBody>
+          <a:bodyPr wrap="square" lIns="0" tIns="0" rIns="0" bIns="0" anchor="t">
+            <a:spAutoFit/>
+          </a:bodyPr>
+          <a:lstStyle/>
+          <a:p>
+            <a:pPr algn="l"/>
+            <a:r>
+              <a:rPr sz="1100" b="0" i="0" dirty="0">
+                <a:solidFill>
+                  <a:srgbClr val="5C7182"/>
+                </a:solidFill>
+                <a:latin typeface="Calibri"/>
+              </a:rPr>
+              <a:t>Prices shown in USD. </a:t>
+            </a:r>
+          </a:p>
+        </p:txBody>
+      </p:sp>
+      <p:sp>
+        <p:nvSpPr>
+          <p:cNvPr id="6" name="Rounded Rectangle 5"/>
+          <p:cNvSpPr/>
+          <p:nvPr/>
+        </p:nvSpPr>
+        <p:spPr>
+          <a:xfrm>
+            <a:off x="11323015" y="6025896"/>
+            <a:ext cx="603504" cy="603504"/>
+          </a:xfrm>
+          <a:prstGeom prst="roundRect">
+            <a:avLst>
+              <a:gd name="adj" fmla="val 32000"/>
+            </a:avLst>
+          </a:prstGeom>
+          <a:solidFill>
+            <a:srgbClr val="FFFFFF"/>
+          </a:solidFill>
+          <a:ln>
+            <a:noFill/>
+          </a:ln>
+          <a:effectLst>
+            <a:outerShdw blurRad="90000" dist="30000" dir="5400000" rotWithShape="0">
+              <a:srgbClr val="0F2836">
+                <a:alpha val="22000"/>
+              </a:srgbClr>
+            </a:outerShdw>
+          </a:effectLst>
+        </p:spPr>
+        <p:style>
+          <a:lnRef idx="1">
+            <a:schemeClr val="accent1"/>
+          </a:lnRef>
+          <a:fillRef idx="3">
+            <a:schemeClr val="accent1"/>
+          </a:fillRef>
+          <a:effectRef idx="2">
+            <a:schemeClr val="accent1"/>
+          </a:effectRef>
+          <a:fontRef idx="minor">
+            <a:schemeClr val="lt1"/>
+          </a:fontRef>
+        </p:style>
+        <p:txBody>
+          <a:bodyPr rtlCol="0" anchor="ctr"/>
+          <a:lstStyle/>
+          <a:p>
+            <a:pPr algn="ctr"/>
+            <a:endParaRPr/>
+          </a:p>
+        </p:txBody>
+      </p:sp>
+      <p:pic>
+        <p:nvPicPr>
+          <p:cNvPr id="7" name="Picture 6" descr="app_icon_rounded.png"/>
+          <p:cNvPicPr>
+            <a:picLocks noChangeAspect="1"/>
+          </p:cNvPicPr>
+          <p:nvPr/>
+        </p:nvPicPr>
+        <p:blipFill>
+          <a:blip r:embed="rId2"/>
+          <a:stretch>
+            <a:fillRect/>
+          </a:stretch>
+        </p:blipFill>
+        <p:spPr>
+          <a:xfrm>
+            <a:off x="11368735" y="6071616"/>
+            <a:ext cx="512064" cy="512064"/>
+          </a:xfrm>
+          <a:prstGeom prst="rect">
+            <a:avLst/>
+          </a:prstGeom>
+        </p:spPr>
+      </p:pic>
+      <p:sp>
+        <p:nvSpPr>
+          <p:cNvPr id="8" name="TextBox 7"/>
+          <p:cNvSpPr txBox="1"/>
+          <p:nvPr/>
+        </p:nvSpPr>
+        <p:spPr>
+          <a:xfrm>
+            <a:off x="502920" y="6455664"/>
+            <a:ext cx="4572000" cy="274320"/>
+          </a:xfrm>
+          <a:prstGeom prst="rect">
+            <a:avLst/>
+          </a:prstGeom>
+          <a:noFill/>
+        </p:spPr>
+        <p:txBody>
+          <a:bodyPr wrap="square" lIns="0" tIns="0" rIns="0" bIns="0" anchor="t">
+            <a:spAutoFit/>
+          </a:bodyPr>
+          <a:lstStyle/>
+          <a:p>
+            <a:pPr algn="l"/>
+            <a:r>
+              <a:rPr sz="1000" b="0" i="0">
+                <a:solidFill>
+                  <a:srgbClr val="5C7182"/>
+                </a:solidFill>
+                <a:latin typeface="Calibri"/>
+              </a:rPr>
+              <a:t>GeoNap</a:t>
+            </a:r>
+          </a:p>
+        </p:txBody>
+      </p:sp>
+    </p:spTree>
+  </p:cSld>
+  <p:clrMapOvr>
+    <a:masterClrMapping/>
+  </p:clrMapOvr>
+</p:sld>
+</file>
+
+<file path=ppt/slides/slide18.xml><?xml version="1.0" encoding="utf-8"?>
 <p:sld xmlns:a="http://schemas.openxmlformats.org/drawingml/2006/main" xmlns:r="http://schemas.openxmlformats.org/officeDocument/2006/relationships" xmlns:p="http://schemas.openxmlformats.org/presentationml/2006/main">
   <p:cSld>
     <p:bg>

--- a/docs/GeoNap Presentations/GeoNap_Marketing_Deck.pptx
+++ b/docs/GeoNap Presentations/GeoNap_Marketing_Deck.pptx
@@ -20,9 +20,10 @@
     <p:sldId id="268" r:id="rId14"/>
     <p:sldId id="269" r:id="rId15"/>
     <p:sldId id="270" r:id="rId16"/>
-    <p:sldId id="271" r:id="rId17"/>
-    <p:sldId id="273" r:id="rId18"/>
-    <p:sldId id="272" r:id="rId19"/>
+    <p:sldId id="274" r:id="rId17"/>
+    <p:sldId id="271" r:id="rId18"/>
+    <p:sldId id="273" r:id="rId19"/>
+    <p:sldId id="272" r:id="rId20"/>
   </p:sldIdLst>
   <p:sldSz cx="12192000" cy="6858000"/>
   <p:notesSz cx="6858000" cy="9144000"/>
@@ -7093,6 +7094,950 @@
 </file>
 
 <file path=ppt/slides/slide16.xml><?xml version="1.0" encoding="utf-8"?>
+<p:sld xmlns:a="http://schemas.openxmlformats.org/drawingml/2006/main" xmlns:r="http://schemas.openxmlformats.org/officeDocument/2006/relationships" xmlns:p="http://schemas.openxmlformats.org/presentationml/2006/main">
+  <p:cSld>
+    <p:bg>
+      <p:bgPr>
+        <a:solidFill>
+          <a:srgbClr val="1A3A52"/>
+        </a:solidFill>
+        <a:effectLst/>
+      </p:bgPr>
+    </p:bg>
+    <p:spTree>
+      <p:nvGrpSpPr>
+        <p:cNvPr id="1" name=""/>
+        <p:cNvGrpSpPr/>
+        <p:nvPr/>
+      </p:nvGrpSpPr>
+      <p:grpSpPr>
+        <a:xfrm>
+          <a:off x="0" y="0"/>
+          <a:ext cx="0" cy="0"/>
+          <a:chOff x="0" y="0"/>
+          <a:chExt cx="0" cy="0"/>
+        </a:xfrm>
+      </p:grpSpPr>
+      <p:sp>
+        <p:nvSpPr>
+          <p:cNvPr id="3" name="TextBox 1"/>
+          <p:cNvSpPr txBox="1"/>
+          <p:nvPr/>
+        </p:nvSpPr>
+        <p:spPr>
+          <a:xfrm>
+            <a:off x="548640" y="457200"/>
+            <a:ext cx="7315200" cy="320040"/>
+          </a:xfrm>
+          <a:prstGeom prst="rect">
+            <a:avLst/>
+          </a:prstGeom>
+          <a:noFill/>
+        </p:spPr>
+        <p:txBody>
+          <a:bodyPr wrap="square" lIns="0" tIns="0" rIns="0" bIns="0" anchor="t">
+            <a:spAutoFit/>
+          </a:bodyPr>
+          <a:lstStyle/>
+          <a:p>
+            <a:pPr algn="l"/>
+            <a:r>
+              <a:rPr sz="1300" b="1" i="0" spc="160">
+                <a:solidFill>
+                  <a:srgbClr val="F5C842"/>
+                </a:solidFill>
+                <a:latin typeface="Calibri"/>
+              </a:rPr>
+              <a:t>YOUR DATA, YOUR CONTROL</a:t>
+            </a:r>
+          </a:p>
+        </p:txBody>
+      </p:sp>
+      <p:sp>
+        <p:nvSpPr>
+          <p:cNvPr id="4" name="TextBox 2"/>
+          <p:cNvSpPr txBox="1"/>
+          <p:nvPr/>
+        </p:nvSpPr>
+        <p:spPr>
+          <a:xfrm>
+            <a:off x="548640" y="749808"/>
+            <a:ext cx="9997135" cy="822960"/>
+          </a:xfrm>
+          <a:prstGeom prst="rect">
+            <a:avLst/>
+          </a:prstGeom>
+          <a:noFill/>
+        </p:spPr>
+        <p:txBody>
+          <a:bodyPr wrap="square" lIns="0" tIns="0" rIns="0" bIns="0" anchor="t">
+            <a:spAutoFit/>
+          </a:bodyPr>
+          <a:lstStyle/>
+          <a:p>
+            <a:pPr algn="l">
+              <a:lnSpc>
+                <a:spcPct val="102000"/>
+              </a:lnSpc>
+            </a:pPr>
+            <a:r>
+              <a:rPr sz="3000" b="1" i="0">
+                <a:solidFill>
+                  <a:srgbClr val="FFFFFF"/>
+                </a:solidFill>
+                <a:latin typeface="Cambria"/>
+              </a:rPr>
+              <a:t>Privacy at a Glance</a:t>
+            </a:r>
+          </a:p>
+        </p:txBody>
+      </p:sp>
+      <p:sp>
+        <p:nvSpPr>
+          <p:cNvPr id="5" name="Rounded Rectangle"/>
+          <p:cNvSpPr/>
+          <p:nvPr/>
+        </p:nvSpPr>
+        <p:spPr>
+          <a:xfrm>
+            <a:off x="548640" y="1874519"/>
+            <a:ext cx="5364327" cy="2148840"/>
+          </a:xfrm>
+          <a:prstGeom prst="roundRect">
+            <a:avLst>
+              <a:gd name="adj" fmla="val 7000"/>
+            </a:avLst>
+          </a:prstGeom>
+          <a:solidFill>
+            <a:srgbClr val="24455F"/>
+          </a:solidFill>
+          <a:ln>
+            <a:noFill/>
+          </a:ln>
+          <a:effectLst/>
+        </p:spPr>
+        <p:style>
+          <a:lnRef idx="1">
+            <a:schemeClr val="accent1"/>
+          </a:lnRef>
+          <a:fillRef idx="3">
+            <a:schemeClr val="accent1"/>
+          </a:fillRef>
+          <a:effectRef idx="2">
+            <a:schemeClr val="accent1"/>
+          </a:effectRef>
+          <a:fontRef idx="minor">
+            <a:schemeClr val="lt1"/>
+          </a:fontRef>
+        </p:style>
+        <p:txBody>
+          <a:bodyPr rtlCol="0" anchor="ctr"/>
+          <a:lstStyle/>
+          <a:p>
+            <a:pPr algn="ctr"/>
+            <a:endParaRPr/>
+          </a:p>
+        </p:txBody>
+      </p:sp>
+      <p:sp>
+        <p:nvSpPr>
+          <p:cNvPr id="6" name="Oval"/>
+          <p:cNvSpPr/>
+          <p:nvPr/>
+        </p:nvSpPr>
+        <p:spPr>
+          <a:xfrm>
+            <a:off x="822960" y="2619756"/>
+            <a:ext cx="658368" cy="658368"/>
+          </a:xfrm>
+          <a:prstGeom prst="ellipse">
+            <a:avLst/>
+          </a:prstGeom>
+          <a:solidFill>
+            <a:srgbClr val="0F2836"/>
+          </a:solidFill>
+          <a:ln>
+            <a:noFill/>
+          </a:ln>
+          <a:effectLst/>
+        </p:spPr>
+        <p:style>
+          <a:lnRef idx="1">
+            <a:schemeClr val="accent1"/>
+          </a:lnRef>
+          <a:fillRef idx="3">
+            <a:schemeClr val="accent1"/>
+          </a:fillRef>
+          <a:effectRef idx="2">
+            <a:schemeClr val="accent1"/>
+          </a:effectRef>
+          <a:fontRef idx="minor">
+            <a:schemeClr val="lt1"/>
+          </a:fontRef>
+        </p:style>
+        <p:txBody>
+          <a:bodyPr rtlCol="0" anchor="ctr"/>
+          <a:lstStyle/>
+          <a:p>
+            <a:pPr algn="ctr"/>
+            <a:endParaRPr/>
+          </a:p>
+        </p:txBody>
+      </p:sp>
+      <p:pic>
+        <p:nvPicPr>
+          <p:cNvPr id="7" name="Picture" descr="privacy_icon.png"/>
+          <p:cNvPicPr>
+            <a:picLocks noChangeAspect="1"/>
+          </p:cNvPicPr>
+          <p:nvPr/>
+        </p:nvPicPr>
+        <p:blipFill>
+          <a:blip r:embed="rId2"/>
+          <a:stretch>
+            <a:fillRect/>
+          </a:stretch>
+        </p:blipFill>
+        <p:spPr>
+          <a:xfrm>
+            <a:off x="980968" y="2777764"/>
+            <a:ext cx="342351" cy="342351"/>
+          </a:xfrm>
+          <a:prstGeom prst="rect">
+            <a:avLst/>
+          </a:prstGeom>
+        </p:spPr>
+      </p:pic>
+      <p:sp>
+        <p:nvSpPr>
+          <p:cNvPr id="8" name="TextBox Header"/>
+          <p:cNvSpPr txBox="1"/>
+          <p:nvPr/>
+        </p:nvSpPr>
+        <p:spPr>
+          <a:xfrm>
+            <a:off x="1645919" y="2075688"/>
+            <a:ext cx="4038447" cy="365760"/>
+          </a:xfrm>
+          <a:prstGeom prst="rect">
+            <a:avLst/>
+          </a:prstGeom>
+          <a:noFill/>
+        </p:spPr>
+        <p:txBody>
+          <a:bodyPr wrap="square" lIns="0" tIns="0" rIns="0" bIns="0" anchor="t">
+            <a:spAutoFit/>
+          </a:bodyPr>
+          <a:lstStyle/>
+          <a:p>
+            <a:pPr algn="l"/>
+            <a:r>
+              <a:rPr sz="1550" b="1" i="0">
+                <a:solidFill>
+                  <a:srgbClr val="FFFFFF"/>
+                </a:solidFill>
+                <a:latin typeface="Cambria"/>
+              </a:rPr>
+              <a:t>Location</a:t>
+            </a:r>
+          </a:p>
+        </p:txBody>
+      </p:sp>
+      <p:sp>
+        <p:nvSpPr>
+          <p:cNvPr id="9" name="TextBox Body"/>
+          <p:cNvSpPr txBox="1"/>
+          <p:nvPr/>
+        </p:nvSpPr>
+        <p:spPr>
+          <a:xfrm>
+            <a:off x="1645919" y="2441448"/>
+            <a:ext cx="4038447" cy="1417320"/>
+          </a:xfrm>
+          <a:prstGeom prst="rect">
+            <a:avLst/>
+          </a:prstGeom>
+          <a:noFill/>
+        </p:spPr>
+        <p:txBody>
+          <a:bodyPr wrap="square" lIns="0" tIns="0" rIns="0" bIns="0" anchor="t">
+            <a:spAutoFit/>
+          </a:bodyPr>
+          <a:lstStyle/>
+          <a:p>
+            <a:pPr algn="l">
+              <a:lnSpc>
+                <a:spcPct val="118000"/>
+              </a:lnSpc>
+            </a:pPr>
+            <a:r>
+              <a:rPr sz="1200" b="0" i="0">
+                <a:solidFill>
+                  <a:srgbClr val="B9C6CE"/>
+                </a:solidFill>
+                <a:latin typeface="Calibri"/>
+              </a:rPr>
+              <a:t>Processed entirely on your device — never sent to any server I operate, and kept only as long as needed to trigger your alarm.</a:t>
+            </a:r>
+          </a:p>
+        </p:txBody>
+      </p:sp>
+      <p:sp>
+        <p:nvSpPr>
+          <p:cNvPr id="10" name="Rounded Rectangle"/>
+          <p:cNvSpPr/>
+          <p:nvPr/>
+        </p:nvSpPr>
+        <p:spPr>
+          <a:xfrm>
+            <a:off x="6278727" y="1874519"/>
+            <a:ext cx="5364327" cy="2148840"/>
+          </a:xfrm>
+          <a:prstGeom prst="roundRect">
+            <a:avLst>
+              <a:gd name="adj" fmla="val 7000"/>
+            </a:avLst>
+          </a:prstGeom>
+          <a:solidFill>
+            <a:srgbClr val="24455F"/>
+          </a:solidFill>
+          <a:ln>
+            <a:noFill/>
+          </a:ln>
+          <a:effectLst/>
+        </p:spPr>
+        <p:style>
+          <a:lnRef idx="1">
+            <a:schemeClr val="accent1"/>
+          </a:lnRef>
+          <a:fillRef idx="3">
+            <a:schemeClr val="accent1"/>
+          </a:fillRef>
+          <a:effectRef idx="2">
+            <a:schemeClr val="accent1"/>
+          </a:effectRef>
+          <a:fontRef idx="minor">
+            <a:schemeClr val="lt1"/>
+          </a:fontRef>
+        </p:style>
+        <p:txBody>
+          <a:bodyPr rtlCol="0" anchor="ctr"/>
+          <a:lstStyle/>
+          <a:p>
+            <a:pPr algn="ctr"/>
+            <a:endParaRPr/>
+          </a:p>
+        </p:txBody>
+      </p:sp>
+      <p:sp>
+        <p:nvSpPr>
+          <p:cNvPr id="11" name="Oval"/>
+          <p:cNvSpPr/>
+          <p:nvPr/>
+        </p:nvSpPr>
+        <p:spPr>
+          <a:xfrm>
+            <a:off x="6553047" y="2619756"/>
+            <a:ext cx="658368" cy="658368"/>
+          </a:xfrm>
+          <a:prstGeom prst="ellipse">
+            <a:avLst/>
+          </a:prstGeom>
+          <a:solidFill>
+            <a:srgbClr val="0F2836"/>
+          </a:solidFill>
+          <a:ln>
+            <a:noFill/>
+          </a:ln>
+          <a:effectLst/>
+        </p:spPr>
+        <p:style>
+          <a:lnRef idx="1">
+            <a:schemeClr val="accent1"/>
+          </a:lnRef>
+          <a:fillRef idx="3">
+            <a:schemeClr val="accent1"/>
+          </a:fillRef>
+          <a:effectRef idx="2">
+            <a:schemeClr val="accent1"/>
+          </a:effectRef>
+          <a:fontRef idx="minor">
+            <a:schemeClr val="lt1"/>
+          </a:fontRef>
+        </p:style>
+        <p:txBody>
+          <a:bodyPr rtlCol="0" anchor="ctr"/>
+          <a:lstStyle/>
+          <a:p>
+            <a:pPr algn="ctr"/>
+            <a:endParaRPr/>
+          </a:p>
+        </p:txBody>
+      </p:sp>
+      <p:pic>
+        <p:nvPicPr>
+          <p:cNvPr id="12" name="Picture" descr="privacy_icon.png"/>
+          <p:cNvPicPr>
+            <a:picLocks noChangeAspect="1"/>
+          </p:cNvPicPr>
+          <p:nvPr/>
+        </p:nvPicPr>
+        <p:blipFill>
+          <a:blip r:embed="rId3"/>
+          <a:stretch>
+            <a:fillRect/>
+          </a:stretch>
+        </p:blipFill>
+        <p:spPr>
+          <a:xfrm>
+            <a:off x="6711055" y="2777764"/>
+            <a:ext cx="342351" cy="342351"/>
+          </a:xfrm>
+          <a:prstGeom prst="rect">
+            <a:avLst/>
+          </a:prstGeom>
+        </p:spPr>
+      </p:pic>
+      <p:sp>
+        <p:nvSpPr>
+          <p:cNvPr id="13" name="TextBox Header"/>
+          <p:cNvSpPr txBox="1"/>
+          <p:nvPr/>
+        </p:nvSpPr>
+        <p:spPr>
+          <a:xfrm>
+            <a:off x="7376006" y="2075688"/>
+            <a:ext cx="4038447" cy="365760"/>
+          </a:xfrm>
+          <a:prstGeom prst="rect">
+            <a:avLst/>
+          </a:prstGeom>
+          <a:noFill/>
+        </p:spPr>
+        <p:txBody>
+          <a:bodyPr wrap="square" lIns="0" tIns="0" rIns="0" bIns="0" anchor="t">
+            <a:spAutoFit/>
+          </a:bodyPr>
+          <a:lstStyle/>
+          <a:p>
+            <a:pPr algn="l"/>
+            <a:r>
+              <a:rPr sz="1550" b="1" i="0">
+                <a:solidFill>
+                  <a:srgbClr val="FFFFFF"/>
+                </a:solidFill>
+                <a:latin typeface="Cambria"/>
+              </a:rPr>
+              <a:t>Auto-Notify Contacts</a:t>
+            </a:r>
+          </a:p>
+        </p:txBody>
+      </p:sp>
+      <p:sp>
+        <p:nvSpPr>
+          <p:cNvPr id="14" name="TextBox Body"/>
+          <p:cNvSpPr txBox="1"/>
+          <p:nvPr/>
+        </p:nvSpPr>
+        <p:spPr>
+          <a:xfrm>
+            <a:off x="7376006" y="2441448"/>
+            <a:ext cx="4038447" cy="1417320"/>
+          </a:xfrm>
+          <a:prstGeom prst="rect">
+            <a:avLst/>
+          </a:prstGeom>
+          <a:noFill/>
+        </p:spPr>
+        <p:txBody>
+          <a:bodyPr wrap="square" lIns="0" tIns="0" rIns="0" bIns="0" anchor="t">
+            <a:spAutoFit/>
+          </a:bodyPr>
+          <a:lstStyle/>
+          <a:p>
+            <a:pPr algn="l">
+              <a:lnSpc>
+                <a:spcPct val="118000"/>
+              </a:lnSpc>
+            </a:pPr>
+            <a:r>
+              <a:rPr sz="1200" b="0" i="0">
+                <a:solidFill>
+                  <a:srgbClr val="B9C6CE"/>
+                </a:solidFill>
+                <a:latin typeface="Calibri"/>
+              </a:rPr>
+              <a:t>Only the contact(s) you pick via Apple’s contact picker — just a name and phone number or email. No bulk access to your address book.</a:t>
+            </a:r>
+          </a:p>
+        </p:txBody>
+      </p:sp>
+      <p:sp>
+        <p:nvSpPr>
+          <p:cNvPr id="15" name="Rounded Rectangle"/>
+          <p:cNvSpPr/>
+          <p:nvPr/>
+        </p:nvSpPr>
+        <p:spPr>
+          <a:xfrm>
+            <a:off x="548640" y="4343400"/>
+            <a:ext cx="5364327" cy="2148840"/>
+          </a:xfrm>
+          <a:prstGeom prst="roundRect">
+            <a:avLst>
+              <a:gd name="adj" fmla="val 7000"/>
+            </a:avLst>
+          </a:prstGeom>
+          <a:solidFill>
+            <a:srgbClr val="24455F"/>
+          </a:solidFill>
+          <a:ln>
+            <a:noFill/>
+          </a:ln>
+          <a:effectLst/>
+        </p:spPr>
+        <p:style>
+          <a:lnRef idx="1">
+            <a:schemeClr val="accent1"/>
+          </a:lnRef>
+          <a:fillRef idx="3">
+            <a:schemeClr val="accent1"/>
+          </a:fillRef>
+          <a:effectRef idx="2">
+            <a:schemeClr val="accent1"/>
+          </a:effectRef>
+          <a:fontRef idx="minor">
+            <a:schemeClr val="lt1"/>
+          </a:fontRef>
+        </p:style>
+        <p:txBody>
+          <a:bodyPr rtlCol="0" anchor="ctr"/>
+          <a:lstStyle/>
+          <a:p>
+            <a:pPr algn="ctr"/>
+            <a:endParaRPr/>
+          </a:p>
+        </p:txBody>
+      </p:sp>
+      <p:sp>
+        <p:nvSpPr>
+          <p:cNvPr id="16" name="Oval"/>
+          <p:cNvSpPr/>
+          <p:nvPr/>
+        </p:nvSpPr>
+        <p:spPr>
+          <a:xfrm>
+            <a:off x="822960" y="5088637"/>
+            <a:ext cx="658368" cy="658368"/>
+          </a:xfrm>
+          <a:prstGeom prst="ellipse">
+            <a:avLst/>
+          </a:prstGeom>
+          <a:solidFill>
+            <a:srgbClr val="0F2836"/>
+          </a:solidFill>
+          <a:ln>
+            <a:noFill/>
+          </a:ln>
+          <a:effectLst/>
+        </p:spPr>
+        <p:style>
+          <a:lnRef idx="1">
+            <a:schemeClr val="accent1"/>
+          </a:lnRef>
+          <a:fillRef idx="3">
+            <a:schemeClr val="accent1"/>
+          </a:fillRef>
+          <a:effectRef idx="2">
+            <a:schemeClr val="accent1"/>
+          </a:effectRef>
+          <a:fontRef idx="minor">
+            <a:schemeClr val="lt1"/>
+          </a:fontRef>
+        </p:style>
+        <p:txBody>
+          <a:bodyPr rtlCol="0" anchor="ctr"/>
+          <a:lstStyle/>
+          <a:p>
+            <a:pPr algn="ctr"/>
+            <a:endParaRPr/>
+          </a:p>
+        </p:txBody>
+      </p:sp>
+      <p:pic>
+        <p:nvPicPr>
+          <p:cNvPr id="17" name="Picture" descr="privacy_icon.png"/>
+          <p:cNvPicPr>
+            <a:picLocks noChangeAspect="1"/>
+          </p:cNvPicPr>
+          <p:nvPr/>
+        </p:nvPicPr>
+        <p:blipFill>
+          <a:blip r:embed="rId4"/>
+          <a:stretch>
+            <a:fillRect/>
+          </a:stretch>
+        </p:blipFill>
+        <p:spPr>
+          <a:xfrm>
+            <a:off x="980968" y="5246645"/>
+            <a:ext cx="342351" cy="342351"/>
+          </a:xfrm>
+          <a:prstGeom prst="rect">
+            <a:avLst/>
+          </a:prstGeom>
+        </p:spPr>
+      </p:pic>
+      <p:sp>
+        <p:nvSpPr>
+          <p:cNvPr id="18" name="TextBox Header"/>
+          <p:cNvSpPr txBox="1"/>
+          <p:nvPr/>
+        </p:nvSpPr>
+        <p:spPr>
+          <a:xfrm>
+            <a:off x="1645919" y="4544569"/>
+            <a:ext cx="4038447" cy="365760"/>
+          </a:xfrm>
+          <a:prstGeom prst="rect">
+            <a:avLst/>
+          </a:prstGeom>
+          <a:noFill/>
+        </p:spPr>
+        <p:txBody>
+          <a:bodyPr wrap="square" lIns="0" tIns="0" rIns="0" bIns="0" anchor="t">
+            <a:spAutoFit/>
+          </a:bodyPr>
+          <a:lstStyle/>
+          <a:p>
+            <a:pPr algn="l"/>
+            <a:r>
+              <a:rPr sz="1550" b="1" i="0">
+                <a:solidFill>
+                  <a:srgbClr val="FFFFFF"/>
+                </a:solidFill>
+                <a:latin typeface="Cambria"/>
+              </a:rPr>
+              <a:t>Apple Watch</a:t>
+            </a:r>
+          </a:p>
+        </p:txBody>
+      </p:sp>
+      <p:sp>
+        <p:nvSpPr>
+          <p:cNvPr id="19" name="TextBox Body"/>
+          <p:cNvSpPr txBox="1"/>
+          <p:nvPr/>
+        </p:nvSpPr>
+        <p:spPr>
+          <a:xfrm>
+            <a:off x="1645919" y="4910329"/>
+            <a:ext cx="4038447" cy="1417320"/>
+          </a:xfrm>
+          <a:prstGeom prst="rect">
+            <a:avLst/>
+          </a:prstGeom>
+          <a:noFill/>
+        </p:spPr>
+        <p:txBody>
+          <a:bodyPr wrap="square" lIns="0" tIns="0" rIns="0" bIns="0" anchor="t">
+            <a:spAutoFit/>
+          </a:bodyPr>
+          <a:lstStyle/>
+          <a:p>
+            <a:pPr algn="l">
+              <a:lnSpc>
+                <a:spcPct val="118000"/>
+              </a:lnSpc>
+            </a:pPr>
+            <a:r>
+              <a:rPr sz="1200" b="0" i="0">
+                <a:solidFill>
+                  <a:srgbClr val="B9C6CE"/>
+                </a:solidFill>
+                <a:latin typeface="Calibri"/>
+              </a:rPr>
+              <a:t>Alarms sync device-to-device via WatchConnectivity and live in a local App Group on your Watch — never synced to iCloud from the Watch.</a:t>
+            </a:r>
+          </a:p>
+        </p:txBody>
+      </p:sp>
+      <p:sp>
+        <p:nvSpPr>
+          <p:cNvPr id="20" name="Rounded Rectangle"/>
+          <p:cNvSpPr/>
+          <p:nvPr/>
+        </p:nvSpPr>
+        <p:spPr>
+          <a:xfrm>
+            <a:off x="6278727" y="4343400"/>
+            <a:ext cx="5364327" cy="2148840"/>
+          </a:xfrm>
+          <a:prstGeom prst="roundRect">
+            <a:avLst>
+              <a:gd name="adj" fmla="val 7000"/>
+            </a:avLst>
+          </a:prstGeom>
+          <a:solidFill>
+            <a:srgbClr val="24455F"/>
+          </a:solidFill>
+          <a:ln>
+            <a:noFill/>
+          </a:ln>
+          <a:effectLst/>
+        </p:spPr>
+        <p:style>
+          <a:lnRef idx="1">
+            <a:schemeClr val="accent1"/>
+          </a:lnRef>
+          <a:fillRef idx="3">
+            <a:schemeClr val="accent1"/>
+          </a:fillRef>
+          <a:effectRef idx="2">
+            <a:schemeClr val="accent1"/>
+          </a:effectRef>
+          <a:fontRef idx="minor">
+            <a:schemeClr val="lt1"/>
+          </a:fontRef>
+        </p:style>
+        <p:txBody>
+          <a:bodyPr rtlCol="0" anchor="ctr"/>
+          <a:lstStyle/>
+          <a:p>
+            <a:pPr algn="ctr"/>
+            <a:endParaRPr/>
+          </a:p>
+        </p:txBody>
+      </p:sp>
+      <p:sp>
+        <p:nvSpPr>
+          <p:cNvPr id="21" name="Oval"/>
+          <p:cNvSpPr/>
+          <p:nvPr/>
+        </p:nvSpPr>
+        <p:spPr>
+          <a:xfrm>
+            <a:off x="6553047" y="5088637"/>
+            <a:ext cx="658368" cy="658368"/>
+          </a:xfrm>
+          <a:prstGeom prst="ellipse">
+            <a:avLst/>
+          </a:prstGeom>
+          <a:solidFill>
+            <a:srgbClr val="0F2836"/>
+          </a:solidFill>
+          <a:ln>
+            <a:noFill/>
+          </a:ln>
+          <a:effectLst/>
+        </p:spPr>
+        <p:style>
+          <a:lnRef idx="1">
+            <a:schemeClr val="accent1"/>
+          </a:lnRef>
+          <a:fillRef idx="3">
+            <a:schemeClr val="accent1"/>
+          </a:fillRef>
+          <a:effectRef idx="2">
+            <a:schemeClr val="accent1"/>
+          </a:effectRef>
+          <a:fontRef idx="minor">
+            <a:schemeClr val="lt1"/>
+          </a:fontRef>
+        </p:style>
+        <p:txBody>
+          <a:bodyPr rtlCol="0" anchor="ctr"/>
+          <a:lstStyle/>
+          <a:p>
+            <a:pPr algn="ctr"/>
+            <a:endParaRPr/>
+          </a:p>
+        </p:txBody>
+      </p:sp>
+      <p:pic>
+        <p:nvPicPr>
+          <p:cNvPr id="22" name="Picture" descr="privacy_icon.png"/>
+          <p:cNvPicPr>
+            <a:picLocks noChangeAspect="1"/>
+          </p:cNvPicPr>
+          <p:nvPr/>
+        </p:nvPicPr>
+        <p:blipFill>
+          <a:blip r:embed="rId5"/>
+          <a:stretch>
+            <a:fillRect/>
+          </a:stretch>
+        </p:blipFill>
+        <p:spPr>
+          <a:xfrm>
+            <a:off x="6711055" y="5246645"/>
+            <a:ext cx="342351" cy="342351"/>
+          </a:xfrm>
+          <a:prstGeom prst="rect">
+            <a:avLst/>
+          </a:prstGeom>
+        </p:spPr>
+      </p:pic>
+      <p:sp>
+        <p:nvSpPr>
+          <p:cNvPr id="23" name="TextBox Header"/>
+          <p:cNvSpPr txBox="1"/>
+          <p:nvPr/>
+        </p:nvSpPr>
+        <p:spPr>
+          <a:xfrm>
+            <a:off x="7376006" y="4544569"/>
+            <a:ext cx="4038447" cy="365760"/>
+          </a:xfrm>
+          <a:prstGeom prst="rect">
+            <a:avLst/>
+          </a:prstGeom>
+          <a:noFill/>
+        </p:spPr>
+        <p:txBody>
+          <a:bodyPr wrap="square" lIns="0" tIns="0" rIns="0" bIns="0" anchor="t">
+            <a:spAutoFit/>
+          </a:bodyPr>
+          <a:lstStyle/>
+          <a:p>
+            <a:pPr algn="l"/>
+            <a:r>
+              <a:rPr sz="1550" b="1" i="0">
+                <a:solidFill>
+                  <a:srgbClr val="FFFFFF"/>
+                </a:solidFill>
+                <a:latin typeface="Cambria"/>
+              </a:rPr>
+              <a:t>Diagnostics</a:t>
+            </a:r>
+          </a:p>
+        </p:txBody>
+      </p:sp>
+      <p:sp>
+        <p:nvSpPr>
+          <p:cNvPr id="24" name="TextBox Body"/>
+          <p:cNvSpPr txBox="1"/>
+          <p:nvPr/>
+        </p:nvSpPr>
+        <p:spPr>
+          <a:xfrm>
+            <a:off x="7376006" y="4910329"/>
+            <a:ext cx="4038447" cy="1417320"/>
+          </a:xfrm>
+          <a:prstGeom prst="rect">
+            <a:avLst/>
+          </a:prstGeom>
+          <a:noFill/>
+        </p:spPr>
+        <p:txBody>
+          <a:bodyPr wrap="square" lIns="0" tIns="0" rIns="0" bIns="0" anchor="t">
+            <a:spAutoFit/>
+          </a:bodyPr>
+          <a:lstStyle/>
+          <a:p>
+            <a:pPr algn="l">
+              <a:lnSpc>
+                <a:spcPct val="118000"/>
+              </a:lnSpc>
+            </a:pPr>
+            <a:r>
+              <a:rPr sz="1200" b="0" i="0">
+                <a:solidFill>
+                  <a:srgbClr val="B9C6CE"/>
+                </a:solidFill>
+                <a:latin typeface="Calibri"/>
+              </a:rPr>
+              <a:t>Anonymous crash reports via Firebase Crashlytics help me fix bugs — never used for ads, tracking, or profiling.</a:t>
+            </a:r>
+          </a:p>
+        </p:txBody>
+      </p:sp>
+      <p:sp>
+        <p:nvSpPr>
+          <p:cNvPr id="25" name="Rounded Rectangle Badge"/>
+          <p:cNvSpPr/>
+          <p:nvPr/>
+        </p:nvSpPr>
+        <p:spPr>
+          <a:xfrm>
+            <a:off x="11323015" y="6025896"/>
+            <a:ext cx="603504" cy="603504"/>
+          </a:xfrm>
+          <a:prstGeom prst="roundRect">
+            <a:avLst>
+              <a:gd name="adj" fmla="val 32000"/>
+            </a:avLst>
+          </a:prstGeom>
+          <a:solidFill>
+            <a:srgbClr val="FFFFFF"/>
+          </a:solidFill>
+          <a:ln>
+            <a:noFill/>
+          </a:ln>
+          <a:effectLst>
+            <a:outerShdw blurRad="90000" dist="30000" dir="5400000" rotWithShape="0">
+              <a:srgbClr val="0F2836">
+                <a:alpha val="22000"/>
+              </a:srgbClr>
+            </a:outerShdw>
+          </a:effectLst>
+        </p:spPr>
+        <p:style>
+          <a:lnRef idx="1">
+            <a:schemeClr val="accent1"/>
+          </a:lnRef>
+          <a:fillRef idx="3">
+            <a:schemeClr val="accent1"/>
+          </a:fillRef>
+          <a:effectRef idx="2">
+            <a:schemeClr val="accent1"/>
+          </a:effectRef>
+          <a:fontRef idx="minor">
+            <a:schemeClr val="lt1"/>
+          </a:fontRef>
+        </p:style>
+        <p:txBody>
+          <a:bodyPr rtlCol="0" anchor="ctr"/>
+          <a:lstStyle/>
+          <a:p>
+            <a:pPr algn="ctr"/>
+            <a:endParaRPr/>
+          </a:p>
+        </p:txBody>
+      </p:sp>
+      <p:pic>
+        <p:nvPicPr>
+          <p:cNvPr id="26" name="Picture Logo" descr="app_icon_rounded.png"/>
+          <p:cNvPicPr>
+            <a:picLocks noChangeAspect="1"/>
+          </p:cNvPicPr>
+          <p:nvPr/>
+        </p:nvPicPr>
+        <p:blipFill>
+          <a:blip r:embed="rId6"/>
+          <a:stretch>
+            <a:fillRect/>
+          </a:stretch>
+        </p:blipFill>
+        <p:spPr>
+          <a:xfrm>
+            <a:off x="11368735" y="6071616"/>
+            <a:ext cx="512064" cy="512064"/>
+          </a:xfrm>
+          <a:prstGeom prst="rect">
+            <a:avLst/>
+          </a:prstGeom>
+        </p:spPr>
+      </p:pic>
+    </p:spTree>
+  </p:cSld>
+  <p:clrMapOvr>
+    <a:masterClrMapping/>
+  </p:clrMapOvr>
+</p:sld>
+</file>
+
+<file path=ppt/slides/slide17.xml><?xml version="1.0" encoding="utf-8"?>
 <p:sld xmlns:a="http://schemas.openxmlformats.org/drawingml/2006/main" xmlns:r="http://schemas.openxmlformats.org/officeDocument/2006/relationships" xmlns:p="http://schemas.openxmlformats.org/presentationml/2006/main">
   <p:cSld>
     <p:bg>
@@ -7659,7 +8604,7 @@
 </p:sld>
 </file>
 
-<file path=ppt/slides/slide17.xml><?xml version="1.0" encoding="utf-8"?>
+<file path=ppt/slides/slide18.xml><?xml version="1.0" encoding="utf-8"?>
 <p:sld xmlns:a="http://schemas.openxmlformats.org/drawingml/2006/main" xmlns:r="http://schemas.openxmlformats.org/officeDocument/2006/relationships" xmlns:p="http://schemas.openxmlformats.org/presentationml/2006/main">
   <p:cSld>
     <p:bg>
@@ -8676,7 +9621,7 @@
 </p:sld>
 </file>
 
-<file path=ppt/slides/slide18.xml><?xml version="1.0" encoding="utf-8"?>
+<file path=ppt/slides/slide19.xml><?xml version="1.0" encoding="utf-8"?>
 <p:sld xmlns:a="http://schemas.openxmlformats.org/drawingml/2006/main" xmlns:r="http://schemas.openxmlformats.org/officeDocument/2006/relationships" xmlns:p="http://schemas.openxmlformats.org/presentationml/2006/main">
   <p:cSld>
     <p:bg>

--- a/docs/GeoNap Presentations/GeoNap_Marketing_Deck.pptx
+++ b/docs/GeoNap Presentations/GeoNap_Marketing_Deck.pptx
@@ -7947,7 +7947,7 @@
                 </a:solidFill>
                 <a:latin typeface="Calibri"/>
               </a:rPr>
-              <a:t>Anonymous crash reports via Firebase Crashlytics help me fix bugs — never used for ads, tracking, or profiling.</a:t>
+              <a:t>Crash and error logging happens entirely on-device via Apple’s own OSLog — no third-party crash SDK, nothing ever leaves your device.</a:t>
             </a:r>
           </a:p>
         </p:txBody>
@@ -11661,7 +11661,7 @@
                 </a:solidFill>
                 <a:latin typeface="Calibri"/>
               </a:rPr>
-              <a:t>Up to 20 active alarms at once — plenty for a daily commute plus every stop on a trip.</a:t>
+              <a:t>Up to 20 active alarms at once on paid tiers — plenty for a daily commute plus every stop on a trip. Free tier includes one active alarm.</a:t>
             </a:r>
           </a:p>
         </p:txBody>

--- a/docs/GeoNap Presentations/GeoNap_Marketing_Deck.pptx
+++ b/docs/GeoNap Presentations/GeoNap_Marketing_Deck.pptx
@@ -320,7 +320,7 @@
           <a:p>
             <a:fld id="{5BCAD085-E8A6-8845-BD4E-CB4CCA059FC4}" type="datetimeFigureOut">
               <a:rPr lang="en-US" smtClean="0"/>
-              <a:t>7/11/26</a:t>
+              <a:t>7/12/26</a:t>
             </a:fld>
             <a:endParaRPr lang="en-US"/>
           </a:p>
@@ -488,7 +488,7 @@
           <a:p>
             <a:fld id="{5BCAD085-E8A6-8845-BD4E-CB4CCA059FC4}" type="datetimeFigureOut">
               <a:rPr lang="en-US" smtClean="0"/>
-              <a:t>7/11/26</a:t>
+              <a:t>7/12/26</a:t>
             </a:fld>
             <a:endParaRPr lang="en-US"/>
           </a:p>
@@ -666,7 +666,7 @@
           <a:p>
             <a:fld id="{5BCAD085-E8A6-8845-BD4E-CB4CCA059FC4}" type="datetimeFigureOut">
               <a:rPr lang="en-US" smtClean="0"/>
-              <a:t>7/11/26</a:t>
+              <a:t>7/12/26</a:t>
             </a:fld>
             <a:endParaRPr lang="en-US"/>
           </a:p>
@@ -834,7 +834,7 @@
           <a:p>
             <a:fld id="{5BCAD085-E8A6-8845-BD4E-CB4CCA059FC4}" type="datetimeFigureOut">
               <a:rPr lang="en-US" smtClean="0"/>
-              <a:t>7/11/26</a:t>
+              <a:t>7/12/26</a:t>
             </a:fld>
             <a:endParaRPr lang="en-US"/>
           </a:p>
@@ -1079,7 +1079,7 @@
           <a:p>
             <a:fld id="{5BCAD085-E8A6-8845-BD4E-CB4CCA059FC4}" type="datetimeFigureOut">
               <a:rPr lang="en-US" smtClean="0"/>
-              <a:t>7/11/26</a:t>
+              <a:t>7/12/26</a:t>
             </a:fld>
             <a:endParaRPr lang="en-US"/>
           </a:p>
@@ -1364,7 +1364,7 @@
           <a:p>
             <a:fld id="{5BCAD085-E8A6-8845-BD4E-CB4CCA059FC4}" type="datetimeFigureOut">
               <a:rPr lang="en-US" smtClean="0"/>
-              <a:t>7/11/26</a:t>
+              <a:t>7/12/26</a:t>
             </a:fld>
             <a:endParaRPr lang="en-US"/>
           </a:p>
@@ -1783,7 +1783,7 @@
           <a:p>
             <a:fld id="{5BCAD085-E8A6-8845-BD4E-CB4CCA059FC4}" type="datetimeFigureOut">
               <a:rPr lang="en-US" smtClean="0"/>
-              <a:t>7/11/26</a:t>
+              <a:t>7/12/26</a:t>
             </a:fld>
             <a:endParaRPr lang="en-US"/>
           </a:p>
@@ -1900,7 +1900,7 @@
           <a:p>
             <a:fld id="{5BCAD085-E8A6-8845-BD4E-CB4CCA059FC4}" type="datetimeFigureOut">
               <a:rPr lang="en-US" smtClean="0"/>
-              <a:t>7/11/26</a:t>
+              <a:t>7/12/26</a:t>
             </a:fld>
             <a:endParaRPr lang="en-US"/>
           </a:p>
@@ -1995,7 +1995,7 @@
           <a:p>
             <a:fld id="{5BCAD085-E8A6-8845-BD4E-CB4CCA059FC4}" type="datetimeFigureOut">
               <a:rPr lang="en-US" smtClean="0"/>
-              <a:t>7/11/26</a:t>
+              <a:t>7/12/26</a:t>
             </a:fld>
             <a:endParaRPr lang="en-US"/>
           </a:p>
@@ -2270,7 +2270,7 @@
           <a:p>
             <a:fld id="{5BCAD085-E8A6-8845-BD4E-CB4CCA059FC4}" type="datetimeFigureOut">
               <a:rPr lang="en-US" smtClean="0"/>
-              <a:t>7/11/26</a:t>
+              <a:t>7/12/26</a:t>
             </a:fld>
             <a:endParaRPr lang="en-US"/>
           </a:p>
@@ -2522,7 +2522,7 @@
           <a:p>
             <a:fld id="{5BCAD085-E8A6-8845-BD4E-CB4CCA059FC4}" type="datetimeFigureOut">
               <a:rPr lang="en-US" smtClean="0"/>
-              <a:t>7/11/26</a:t>
+              <a:t>7/12/26</a:t>
             </a:fld>
             <a:endParaRPr lang="en-US"/>
           </a:p>
@@ -2733,7 +2733,7 @@
           <a:p>
             <a:fld id="{5BCAD085-E8A6-8845-BD4E-CB4CCA059FC4}" type="datetimeFigureOut">
               <a:rPr lang="en-US" smtClean="0"/>
-              <a:t>7/11/26</a:t>
+              <a:t>7/12/26</a:t>
             </a:fld>
             <a:endParaRPr lang="en-US"/>
           </a:p>
@@ -8712,7 +8712,7 @@
           <p:nvPr>
             <p:extLst>
               <p:ext uri="{D42A27DB-BD31-4B8C-83A1-F6EECF244321}">
-                <p14:modId xmlns:p14="http://schemas.microsoft.com/office/powerpoint/2010/main" val="914684238"/>
+                <p14:modId xmlns:p14="http://schemas.microsoft.com/office/powerpoint/2010/main" val="1610082017"/>
               </p:ext>
             </p:extLst>
           </p:nvPr>
@@ -8952,8 +8952,10 @@
                         </a:defRPr>
                       </a:pPr>
                       <a:r>
-                        <a:t>Standard</a:t>
+                        <a:rPr lang="en-US"/>
+                        <a:t>Silver</a:t>
                       </a:r>
+                      <a:endParaRPr dirty="0"/>
                     </a:p>
                     <a:p>
                       <a:pPr>
@@ -8965,6 +8967,7 @@
                         </a:defRPr>
                       </a:pPr>
                       <a:r>
+                        <a:rPr dirty="0"/>
                         <a:t>$2.99 / year</a:t>
                       </a:r>
                     </a:p>
@@ -9123,8 +9126,10 @@
                         </a:defRPr>
                       </a:pPr>
                       <a:r>
-                        <a:t>Silver</a:t>
+                        <a:rPr lang="en-US" dirty="0"/>
+                        <a:t>Gold</a:t>
                       </a:r>
+                      <a:endParaRPr dirty="0"/>
                     </a:p>
                     <a:p>
                       <a:pPr>
@@ -9136,6 +9141,7 @@
                         </a:defRPr>
                       </a:pPr>
                       <a:r>
+                        <a:rPr dirty="0"/>
                         <a:t>$6.99 / year</a:t>
                       </a:r>
                     </a:p>
@@ -9270,9 +9276,17 @@
                         </a:defRPr>
                       </a:pPr>
                       <a:r>
-                        <a:rPr dirty="0"/>
-                        <a:t>Gold</a:t>
+                        <a:rPr lang="en-US" sz="1400" b="1" kern="1200" dirty="0">
+                          <a:solidFill>
+                            <a:schemeClr val="dk1"/>
+                          </a:solidFill>
+                          <a:latin typeface="+mn-lt"/>
+                          <a:ea typeface="+mn-ea"/>
+                          <a:cs typeface="+mn-cs"/>
+                        </a:rPr>
+                        <a:t>Platinum</a:t>
                       </a:r>
+                      <a:endParaRPr dirty="0"/>
                     </a:p>
                     <a:p>
                       <a:pPr>

--- a/docs/GeoNap Presentations/GeoNap_Marketing_Deck.pptx
+++ b/docs/GeoNap Presentations/GeoNap_Marketing_Deck.pptx
@@ -3809,7 +3809,7 @@
                 </a:solidFill>
                 <a:latin typeface="Calibri"/>
               </a:rPr>
-              <a:t>1.157-20260711</a:t>
+              <a:t>1.145-20260712</a:t>
             </a:r>
             <a:endParaRPr sz="1150" b="1" i="0" dirty="0">
               <a:solidFill>

--- a/docs/GeoNap Presentations/GeoNap_Marketing_Deck.pptx
+++ b/docs/GeoNap Presentations/GeoNap_Marketing_Deck.pptx
@@ -320,7 +320,7 @@
           <a:p>
             <a:fld id="{5BCAD085-E8A6-8845-BD4E-CB4CCA059FC4}" type="datetimeFigureOut">
               <a:rPr lang="en-US" smtClean="0"/>
-              <a:t>7/12/26</a:t>
+              <a:t>8/6/26</a:t>
             </a:fld>
             <a:endParaRPr lang="en-US"/>
           </a:p>
@@ -488,7 +488,7 @@
           <a:p>
             <a:fld id="{5BCAD085-E8A6-8845-BD4E-CB4CCA059FC4}" type="datetimeFigureOut">
               <a:rPr lang="en-US" smtClean="0"/>
-              <a:t>7/12/26</a:t>
+              <a:t>8/6/26</a:t>
             </a:fld>
             <a:endParaRPr lang="en-US"/>
           </a:p>
@@ -666,7 +666,7 @@
           <a:p>
             <a:fld id="{5BCAD085-E8A6-8845-BD4E-CB4CCA059FC4}" type="datetimeFigureOut">
               <a:rPr lang="en-US" smtClean="0"/>
-              <a:t>7/12/26</a:t>
+              <a:t>8/6/26</a:t>
             </a:fld>
             <a:endParaRPr lang="en-US"/>
           </a:p>
@@ -834,7 +834,7 @@
           <a:p>
             <a:fld id="{5BCAD085-E8A6-8845-BD4E-CB4CCA059FC4}" type="datetimeFigureOut">
               <a:rPr lang="en-US" smtClean="0"/>
-              <a:t>7/12/26</a:t>
+              <a:t>8/6/26</a:t>
             </a:fld>
             <a:endParaRPr lang="en-US"/>
           </a:p>
@@ -1079,7 +1079,7 @@
           <a:p>
             <a:fld id="{5BCAD085-E8A6-8845-BD4E-CB4CCA059FC4}" type="datetimeFigureOut">
               <a:rPr lang="en-US" smtClean="0"/>
-              <a:t>7/12/26</a:t>
+              <a:t>8/6/26</a:t>
             </a:fld>
             <a:endParaRPr lang="en-US"/>
           </a:p>
@@ -1364,7 +1364,7 @@
           <a:p>
             <a:fld id="{5BCAD085-E8A6-8845-BD4E-CB4CCA059FC4}" type="datetimeFigureOut">
               <a:rPr lang="en-US" smtClean="0"/>
-              <a:t>7/12/26</a:t>
+              <a:t>8/6/26</a:t>
             </a:fld>
             <a:endParaRPr lang="en-US"/>
           </a:p>
@@ -1783,7 +1783,7 @@
           <a:p>
             <a:fld id="{5BCAD085-E8A6-8845-BD4E-CB4CCA059FC4}" type="datetimeFigureOut">
               <a:rPr lang="en-US" smtClean="0"/>
-              <a:t>7/12/26</a:t>
+              <a:t>8/6/26</a:t>
             </a:fld>
             <a:endParaRPr lang="en-US"/>
           </a:p>
@@ -1900,7 +1900,7 @@
           <a:p>
             <a:fld id="{5BCAD085-E8A6-8845-BD4E-CB4CCA059FC4}" type="datetimeFigureOut">
               <a:rPr lang="en-US" smtClean="0"/>
-              <a:t>7/12/26</a:t>
+              <a:t>8/6/26</a:t>
             </a:fld>
             <a:endParaRPr lang="en-US"/>
           </a:p>
@@ -1995,7 +1995,7 @@
           <a:p>
             <a:fld id="{5BCAD085-E8A6-8845-BD4E-CB4CCA059FC4}" type="datetimeFigureOut">
               <a:rPr lang="en-US" smtClean="0"/>
-              <a:t>7/12/26</a:t>
+              <a:t>8/6/26</a:t>
             </a:fld>
             <a:endParaRPr lang="en-US"/>
           </a:p>
@@ -2270,7 +2270,7 @@
           <a:p>
             <a:fld id="{5BCAD085-E8A6-8845-BD4E-CB4CCA059FC4}" type="datetimeFigureOut">
               <a:rPr lang="en-US" smtClean="0"/>
-              <a:t>7/12/26</a:t>
+              <a:t>8/6/26</a:t>
             </a:fld>
             <a:endParaRPr lang="en-US"/>
           </a:p>
@@ -2522,7 +2522,7 @@
           <a:p>
             <a:fld id="{5BCAD085-E8A6-8845-BD4E-CB4CCA059FC4}" type="datetimeFigureOut">
               <a:rPr lang="en-US" smtClean="0"/>
-              <a:t>7/12/26</a:t>
+              <a:t>8/6/26</a:t>
             </a:fld>
             <a:endParaRPr lang="en-US"/>
           </a:p>
@@ -2733,7 +2733,7 @@
           <a:p>
             <a:fld id="{5BCAD085-E8A6-8845-BD4E-CB4CCA059FC4}" type="datetimeFigureOut">
               <a:rPr lang="en-US" smtClean="0"/>
-              <a:t>7/12/26</a:t>
+              <a:t>8/6/26</a:t>
             </a:fld>
             <a:endParaRPr lang="en-US"/>
           </a:p>
@@ -8142,11 +8142,17 @@
           <p:cNvGraphicFramePr>
             <a:graphicFrameLocks noGrp="1"/>
           </p:cNvGraphicFramePr>
-          <p:nvPr/>
+          <p:nvPr>
+            <p:extLst>
+              <p:ext uri="{D42A27DB-BD31-4B8C-83A1-F6EECF244321}">
+                <p14:modId xmlns:p14="http://schemas.microsoft.com/office/powerpoint/2010/main" val="1502356154"/>
+              </p:ext>
+            </p:extLst>
+          </p:nvPr>
         </p:nvGraphicFramePr>
         <p:xfrm>
-          <a:off x="548640" y="1874519"/>
-          <a:ext cx="11091672" cy="4160520"/>
+          <a:off x="548640" y="1298446"/>
+          <a:ext cx="11091672" cy="5157216"/>
         </p:xfrm>
         <a:graphic>
           <a:graphicData uri="http://schemas.openxmlformats.org/drawingml/2006/table">
@@ -8170,7 +8176,7 @@
                   </a:extLst>
                 </a:gridCol>
               </a:tblGrid>
-              <a:tr h="832104">
+              <a:tr h="859536">
                 <a:tc>
                   <a:txBody>
                     <a:bodyPr/>
@@ -8225,7 +8231,7 @@
                   </a:ext>
                 </a:extLst>
               </a:tr>
-              <a:tr h="832104">
+              <a:tr h="859536">
                 <a:tc>
                   <a:txBody>
                     <a:bodyPr/>
@@ -8280,7 +8286,7 @@
                   </a:ext>
                 </a:extLst>
               </a:tr>
-              <a:tr h="832104">
+              <a:tr h="859536">
                 <a:tc>
                   <a:txBody>
                     <a:bodyPr/>
@@ -8335,7 +8341,7 @@
                   </a:ext>
                 </a:extLst>
               </a:tr>
-              <a:tr h="832104">
+              <a:tr h="859536">
                 <a:tc>
                   <a:txBody>
                     <a:bodyPr/>
@@ -8374,6 +8380,7 @@
                         </a:defRPr>
                       </a:pPr>
                       <a:r>
+                        <a:rPr dirty="0"/>
                         <a:t>watchOS 26.0 or later (companion features)</a:t>
                       </a:r>
                     </a:p>
@@ -8390,7 +8397,98 @@
                   </a:ext>
                 </a:extLst>
               </a:tr>
-              <a:tr h="832104">
+              <a:tr h="859536">
+                <a:tc>
+                  <a:txBody>
+                    <a:bodyPr/>
+                    <a:lstStyle/>
+                    <a:p>
+                      <a:pPr marL="0" algn="l" defTabSz="457200" rtl="0" eaLnBrk="1" latinLnBrk="0" hangingPunct="1">
+                        <a:defRPr sz="1250" b="1">
+                          <a:solidFill>
+                            <a:srgbClr val="17303F"/>
+                          </a:solidFill>
+                          <a:latin typeface="Calibri"/>
+                        </a:defRPr>
+                      </a:pPr>
+                      <a:r>
+                        <a:rPr lang="en-US" sz="1250" b="1" kern="1200" dirty="0">
+                          <a:solidFill>
+                            <a:srgbClr val="17303F"/>
+                          </a:solidFill>
+                          <a:latin typeface="Calibri"/>
+                          <a:ea typeface="+mn-ea"/>
+                          <a:cs typeface="+mn-cs"/>
+                        </a:rPr>
+                        <a:t>Car Play / Apple Shortcuts</a:t>
+                      </a:r>
+                      <a:endParaRPr sz="1250" b="1" kern="1200" dirty="0">
+                        <a:solidFill>
+                          <a:srgbClr val="17303F"/>
+                        </a:solidFill>
+                        <a:latin typeface="Calibri"/>
+                        <a:ea typeface="+mn-ea"/>
+                        <a:cs typeface="+mn-cs"/>
+                      </a:endParaRPr>
+                    </a:p>
+                  </a:txBody>
+                  <a:tcPr marL="109728" anchor="ctr">
+                    <a:solidFill>
+                      <a:schemeClr val="bg1">
+                        <a:lumMod val="95000"/>
+                      </a:schemeClr>
+                    </a:solidFill>
+                  </a:tcPr>
+                </a:tc>
+                <a:tc>
+                  <a:txBody>
+                    <a:bodyPr/>
+                    <a:lstStyle/>
+                    <a:p>
+                      <a:pPr marL="0" algn="l" defTabSz="457200" rtl="0" eaLnBrk="1" latinLnBrk="0" hangingPunct="1">
+                        <a:defRPr sz="1250" b="1">
+                          <a:solidFill>
+                            <a:srgbClr val="17303F"/>
+                          </a:solidFill>
+                          <a:latin typeface="Calibri"/>
+                        </a:defRPr>
+                      </a:pPr>
+                      <a:r>
+                        <a:rPr lang="en-US" sz="1250" b="1" kern="1200" dirty="0">
+                          <a:solidFill>
+                            <a:srgbClr val="17303F"/>
+                          </a:solidFill>
+                          <a:latin typeface="Calibri"/>
+                          <a:ea typeface="+mn-ea"/>
+                          <a:cs typeface="+mn-cs"/>
+                        </a:rPr>
+                        <a:t>Supported</a:t>
+                      </a:r>
+                      <a:endParaRPr sz="1250" b="1" kern="1200" dirty="0">
+                        <a:solidFill>
+                          <a:srgbClr val="17303F"/>
+                        </a:solidFill>
+                        <a:latin typeface="Calibri"/>
+                        <a:ea typeface="+mn-ea"/>
+                        <a:cs typeface="+mn-cs"/>
+                      </a:endParaRPr>
+                    </a:p>
+                  </a:txBody>
+                  <a:tcPr marL="109728" anchor="ctr">
+                    <a:solidFill>
+                      <a:schemeClr val="bg1">
+                        <a:lumMod val="95000"/>
+                      </a:schemeClr>
+                    </a:solidFill>
+                  </a:tcPr>
+                </a:tc>
+                <a:extLst>
+                  <a:ext uri="{0D108BD9-81ED-4DB2-BD59-A6C34878D82A}">
+                    <a16:rowId xmlns:a16="http://schemas.microsoft.com/office/drawing/2014/main" val="3441994490"/>
+                  </a:ext>
+                </a:extLst>
+              </a:tr>
+              <a:tr h="859536">
                 <a:tc>
                   <a:txBody>
                     <a:bodyPr/>
@@ -8405,13 +8503,14 @@
                         </a:defRPr>
                       </a:pPr>
                       <a:r>
+                        <a:rPr dirty="0"/>
                         <a:t>Connectivity</a:t>
                       </a:r>
                     </a:p>
                   </a:txBody>
                   <a:tcPr marL="109728" anchor="ctr">
                     <a:solidFill>
-                      <a:srgbClr val="EFF2F5"/>
+                      <a:schemeClr val="bg1"/>
                     </a:solidFill>
                   </a:tcPr>
                 </a:tc>
@@ -8429,13 +8528,14 @@
                         </a:defRPr>
                       </a:pPr>
                       <a:r>
+                        <a:rPr dirty="0"/>
                         <a:t>Offline for standard alarms; internet needed only for transit feed downloads</a:t>
                       </a:r>
                     </a:p>
                   </a:txBody>
                   <a:tcPr marL="109728" anchor="ctr">
                     <a:solidFill>
-                      <a:srgbClr val="EFF2F5"/>
+                      <a:schemeClr val="bg1"/>
                     </a:solidFill>
                   </a:tcPr>
                 </a:tc>
@@ -8712,7 +8812,7 @@
           <p:nvPr>
             <p:extLst>
               <p:ext uri="{D42A27DB-BD31-4B8C-83A1-F6EECF244321}">
-                <p14:modId xmlns:p14="http://schemas.microsoft.com/office/powerpoint/2010/main" val="1610082017"/>
+                <p14:modId xmlns:p14="http://schemas.microsoft.com/office/powerpoint/2010/main" val="22816343"/>
               </p:ext>
             </p:extLst>
           </p:nvPr>
@@ -9170,7 +9270,25 @@
                           </a:solidFill>
                           <a:latin typeface="Calibri"/>
                         </a:rPr>
-                        <a:t>Everything in Standard, plus:</a:t>
+                        <a:t>Everything in </a:t>
+                      </a:r>
+                      <a:r>
+                        <a:rPr lang="en-US" sz="1050" b="1" i="1" dirty="0">
+                          <a:solidFill>
+                            <a:srgbClr val="5C7182"/>
+                          </a:solidFill>
+                          <a:latin typeface="Calibri"/>
+                        </a:rPr>
+                        <a:t>Silver</a:t>
+                      </a:r>
+                      <a:r>
+                        <a:rPr sz="1050" b="1" i="1" dirty="0">
+                          <a:solidFill>
+                            <a:srgbClr val="5C7182"/>
+                          </a:solidFill>
+                          <a:latin typeface="Calibri"/>
+                        </a:rPr>
+                        <a:t>, plus:</a:t>
                       </a:r>
                     </a:p>
                     <a:p>
@@ -9327,7 +9445,43 @@
                           </a:solidFill>
                           <a:latin typeface="Calibri"/>
                         </a:rPr>
-                        <a:t>Everything in Silver, plus:</a:t>
+                        <a:t>Everything </a:t>
+                      </a:r>
+                      <a:r>
+                        <a:rPr sz="1050" b="1" i="1">
+                          <a:solidFill>
+                            <a:srgbClr val="5C7182"/>
+                          </a:solidFill>
+                          <a:latin typeface="Calibri"/>
+                        </a:rPr>
+                        <a:t>in </a:t>
+                      </a:r>
+                      <a:r>
+                        <a:rPr lang="en-US" sz="1050" b="1" i="1">
+                          <a:solidFill>
+                            <a:srgbClr val="5C7182"/>
+                          </a:solidFill>
+                          <a:latin typeface="Calibri"/>
+                        </a:rPr>
+                        <a:t>Glod</a:t>
+                      </a:r>
+                      <a:r>
+                        <a:rPr sz="1050" b="1" i="1">
+                          <a:solidFill>
+                            <a:srgbClr val="5C7182"/>
+                          </a:solidFill>
+                          <a:latin typeface="Calibri"/>
+                        </a:rPr>
+                        <a:t>, </a:t>
+                      </a:r>
+                      <a:r>
+                        <a:rPr sz="1050" b="1" i="1" dirty="0">
+                          <a:solidFill>
+                            <a:srgbClr val="5C7182"/>
+                          </a:solidFill>
+                          <a:latin typeface="Calibri"/>
+                        </a:rPr>
+                        <a:t>plus:</a:t>
                       </a:r>
                     </a:p>
                     <a:p>
